--- a/templates/proposal/pptx/tech-architecture.pptx
+++ b/templates/proposal/pptx/tech-architecture.pptx
@@ -1585,8 +1585,8 @@
         </p:nvSpPr>
         <p:spPr>
           <a:xfrm>
-            <a:off x="0" y="6217920"/>
-            <a:ext cx="12192000" cy="73152"/>
+            <a:off x="0" y="6565392"/>
+            <a:ext cx="12192000" cy="54864"/>
           </a:xfrm>
           <a:prstGeom prst="rect">
             <a:avLst/>
@@ -1605,8 +1605,8 @@
         </p:nvSpPr>
         <p:spPr>
           <a:xfrm>
-            <a:off x="274320" y="6291072"/>
-            <a:ext cx="1828800" cy="182880"/>
+            <a:off x="274320" y="6620256"/>
+            <a:ext cx="1828800" cy="201168"/>
           </a:xfrm>
           <a:prstGeom prst="rect">
             <a:avLst/>
@@ -1622,14 +1622,56 @@
               <a:buNone/>
             </a:pPr>
             <a:r>
-              <a:rPr lang="en-US" sz="900" dirty="0">
+              <a:rPr lang="en-US" sz="800" dirty="0">
                 <a:solidFill>
                   <a:srgbClr val="8892B0"/>
                 </a:solidFill>
+                <a:latin typeface="Calibri" pitchFamily="34" charset="0"/>
+                <a:ea typeface="Calibri" pitchFamily="34" charset="-122"/>
+                <a:cs typeface="Calibri" pitchFamily="34" charset="-120"/>
               </a:rPr>
               <a:t>ViePilot</a:t>
             </a:r>
-            <a:endParaRPr lang="en-US" sz="900" dirty="0"/>
+            <a:endParaRPr lang="en-US" sz="800" dirty="0"/>
+          </a:p>
+        </p:txBody>
+      </p:sp>
+      <p:sp>
+        <p:nvSpPr>
+          <p:cNvPr id="4" name="Text 2"/>
+          <p:cNvSpPr/>
+          <p:nvPr/>
+        </p:nvSpPr>
+        <p:spPr>
+          <a:xfrm>
+            <a:off x="10515600" y="6620256"/>
+            <a:ext cx="1371600" cy="201168"/>
+          </a:xfrm>
+          <a:prstGeom prst="rect">
+            <a:avLst/>
+          </a:prstGeom>
+          <a:noFill/>
+          <a:ln/>
+        </p:spPr>
+        <p:txBody>
+          <a:bodyPr wrap="square" rtlCol="0" anchor="ctr"/>
+          <a:lstStyle/>
+          <a:p>
+            <a:pPr algn="r" indent="0" marL="0">
+              <a:buNone/>
+            </a:pPr>
+            <a:r>
+              <a:rPr lang="en-US" sz="800" dirty="0">
+                <a:solidFill>
+                  <a:srgbClr val="5A637A"/>
+                </a:solidFill>
+                <a:latin typeface="Calibri" pitchFamily="34" charset="0"/>
+                <a:ea typeface="Calibri" pitchFamily="34" charset="-122"/>
+                <a:cs typeface="Calibri" pitchFamily="34" charset="-120"/>
+              </a:rPr>
+              <a:t>·</a:t>
+            </a:r>
+            <a:endParaRPr lang="en-US" sz="800" dirty="0"/>
           </a:p>
         </p:txBody>
       </p:sp>
@@ -1944,8 +1986,28 @@
         </p:nvSpPr>
         <p:spPr>
           <a:xfrm>
-            <a:off x="0" y="1645920"/>
-            <a:ext cx="109728" cy="2194560"/>
+            <a:off x="0" y="0"/>
+            <a:ext cx="4754880" cy="6858000"/>
+          </a:xfrm>
+          <a:prstGeom prst="rect">
+            <a:avLst/>
+          </a:prstGeom>
+          <a:solidFill>
+            <a:srgbClr val="2D3142"/>
+          </a:solidFill>
+          <a:ln/>
+        </p:spPr>
+      </p:sp>
+      <p:sp>
+        <p:nvSpPr>
+          <p:cNvPr id="3" name="Shape 1"/>
+          <p:cNvSpPr/>
+          <p:nvPr/>
+        </p:nvSpPr>
+        <p:spPr>
+          <a:xfrm>
+            <a:off x="0" y="0"/>
+            <a:ext cx="182880" cy="6858000"/>
           </a:xfrm>
           <a:prstGeom prst="rect">
             <a:avLst/>
@@ -1958,14 +2020,34 @@
       </p:sp>
       <p:sp>
         <p:nvSpPr>
-          <p:cNvPr id="3" name="Text 1"/>
-          <p:cNvSpPr/>
-          <p:nvPr/>
-        </p:nvSpPr>
-        <p:spPr>
-          <a:xfrm>
-            <a:off x="365760" y="1737360"/>
-            <a:ext cx="10607040" cy="1097280"/>
+          <p:cNvPr id="4" name="Shape 2"/>
+          <p:cNvSpPr/>
+          <p:nvPr/>
+        </p:nvSpPr>
+        <p:spPr>
+          <a:xfrm>
+            <a:off x="4937760" y="2560320"/>
+            <a:ext cx="7040880" cy="45720"/>
+          </a:xfrm>
+          <a:prstGeom prst="rect">
+            <a:avLst/>
+          </a:prstGeom>
+          <a:solidFill>
+            <a:srgbClr val="4F6EF7"/>
+          </a:solidFill>
+          <a:ln/>
+        </p:spPr>
+      </p:sp>
+      <p:sp>
+        <p:nvSpPr>
+          <p:cNvPr id="5" name="Text 3"/>
+          <p:cNvSpPr/>
+          <p:nvPr/>
+        </p:nvSpPr>
+        <p:spPr>
+          <a:xfrm>
+            <a:off x="5120640" y="457200"/>
+            <a:ext cx="6766560" cy="365760"/>
           </a:xfrm>
           <a:prstGeom prst="rect">
             <a:avLst/>
@@ -1981,30 +2063,30 @@
               <a:buNone/>
             </a:pPr>
             <a:r>
-              <a:rPr lang="en-US" sz="4000" b="1" dirty="0">
-                <a:solidFill>
-                  <a:srgbClr val="E8ECF4"/>
-                </a:solidFill>
-                <a:latin typeface="Calibri" pitchFamily="34" charset="0"/>
-                <a:ea typeface="Calibri" pitchFamily="34" charset="-122"/>
-                <a:cs typeface="Calibri" pitchFamily="34" charset="-120"/>
-              </a:rPr>
-              <a:t>{{System Name}}</a:t>
-            </a:r>
-            <a:endParaRPr lang="en-US" sz="4000" dirty="0"/>
-          </a:p>
-        </p:txBody>
-      </p:sp>
-      <p:sp>
-        <p:nvSpPr>
-          <p:cNvPr id="4" name="Text 2"/>
-          <p:cNvSpPr/>
-          <p:nvPr/>
-        </p:nvSpPr>
-        <p:spPr>
-          <a:xfrm>
-            <a:off x="365760" y="2926080"/>
-            <a:ext cx="8229600" cy="640080"/>
+              <a:rPr lang="en-US" sz="1100" b="1" spc="300" kern="0" dirty="0">
+                <a:solidFill>
+                  <a:srgbClr val="4F6EF7"/>
+                </a:solidFill>
+                <a:latin typeface="Calibri" pitchFamily="34" charset="0"/>
+                <a:ea typeface="Calibri" pitchFamily="34" charset="-122"/>
+                <a:cs typeface="Calibri" pitchFamily="34" charset="-120"/>
+              </a:rPr>
+              <a:t>PROPOSAL</a:t>
+            </a:r>
+            <a:endParaRPr lang="en-US" sz="1100" dirty="0"/>
+          </a:p>
+        </p:txBody>
+      </p:sp>
+      <p:sp>
+        <p:nvSpPr>
+          <p:cNvPr id="6" name="Text 4"/>
+          <p:cNvSpPr/>
+          <p:nvPr/>
+        </p:nvSpPr>
+        <p:spPr>
+          <a:xfrm>
+            <a:off x="4937760" y="1005840"/>
+            <a:ext cx="7040880" cy="1645920"/>
           </a:xfrm>
           <a:prstGeom prst="rect">
             <a:avLst/>
@@ -2020,30 +2102,30 @@
               <a:buNone/>
             </a:pPr>
             <a:r>
-              <a:rPr lang="en-US" sz="2000" dirty="0">
-                <a:solidFill>
-                  <a:srgbClr val="8892B0"/>
-                </a:solidFill>
-                <a:latin typeface="Calibri" pitchFamily="34" charset="0"/>
-                <a:ea typeface="Calibri" pitchFamily="34" charset="-122"/>
-                <a:cs typeface="Calibri" pitchFamily="34" charset="-120"/>
-              </a:rPr>
-              <a:t>Technical Architecture · {{Partner}} · {{Date}}</a:t>
-            </a:r>
-            <a:endParaRPr lang="en-US" sz="2000" dirty="0"/>
-          </a:p>
-        </p:txBody>
-      </p:sp>
-      <p:sp>
-        <p:nvSpPr>
-          <p:cNvPr id="5" name="Text 3"/>
-          <p:cNvSpPr/>
-          <p:nvPr/>
-        </p:nvSpPr>
-        <p:spPr>
-          <a:xfrm>
-            <a:off x="365760" y="3840480"/>
-            <a:ext cx="5486400" cy="320040"/>
+              <a:rPr lang="en-US" sz="3400" b="1" dirty="0">
+                <a:solidFill>
+                  <a:srgbClr val="E8ECF4"/>
+                </a:solidFill>
+                <a:latin typeface="Calibri" pitchFamily="34" charset="0"/>
+                <a:ea typeface="Calibri" pitchFamily="34" charset="-122"/>
+                <a:cs typeface="Calibri" pitchFamily="34" charset="-120"/>
+              </a:rPr>
+              <a:t>{{System Name}}</a:t>
+            </a:r>
+            <a:endParaRPr lang="en-US" sz="3400" dirty="0"/>
+          </a:p>
+        </p:txBody>
+      </p:sp>
+      <p:sp>
+        <p:nvSpPr>
+          <p:cNvPr id="7" name="Text 5"/>
+          <p:cNvSpPr/>
+          <p:nvPr/>
+        </p:nvSpPr>
+        <p:spPr>
+          <a:xfrm>
+            <a:off x="4937760" y="2743200"/>
+            <a:ext cx="7040880" cy="822960"/>
           </a:xfrm>
           <a:prstGeom prst="rect">
             <a:avLst/>
@@ -2059,12 +2141,132 @@
               <a:buNone/>
             </a:pPr>
             <a:r>
+              <a:rPr lang="en-US" sz="1700" dirty="0">
+                <a:solidFill>
+                  <a:srgbClr val="8892B0"/>
+                </a:solidFill>
+                <a:latin typeface="Calibri" pitchFamily="34" charset="0"/>
+                <a:ea typeface="Calibri" pitchFamily="34" charset="-122"/>
+                <a:cs typeface="Calibri" pitchFamily="34" charset="-120"/>
+              </a:rPr>
+              <a:t>{{One sentence: what problem this architecture solves at scale}}</a:t>
+            </a:r>
+            <a:endParaRPr lang="en-US" sz="1700" dirty="0"/>
+          </a:p>
+        </p:txBody>
+      </p:sp>
+      <p:sp>
+        <p:nvSpPr>
+          <p:cNvPr id="8" name="Text 6"/>
+          <p:cNvSpPr/>
+          <p:nvPr/>
+        </p:nvSpPr>
+        <p:spPr>
+          <a:xfrm>
+            <a:off x="4937760" y="3749040"/>
+            <a:ext cx="7040880" cy="457200"/>
+          </a:xfrm>
+          <a:prstGeom prst="rect">
+            <a:avLst/>
+          </a:prstGeom>
+          <a:noFill/>
+          <a:ln/>
+        </p:spPr>
+        <p:txBody>
+          <a:bodyPr wrap="square" rtlCol="0" anchor="ctr"/>
+          <a:lstStyle/>
+          <a:p>
+            <a:pPr indent="0" marL="0">
+              <a:buNone/>
+            </a:pPr>
+            <a:r>
+              <a:rPr lang="en-US" sz="1200" dirty="0">
+                <a:solidFill>
+                  <a:srgbClr val="5A637A"/>
+                </a:solidFill>
+                <a:latin typeface="Calibri" pitchFamily="34" charset="0"/>
+                <a:ea typeface="Calibri" pitchFamily="34" charset="-122"/>
+                <a:cs typeface="Calibri" pitchFamily="34" charset="-120"/>
+              </a:rPr>
+              <a:t>Technical Brief for {{Partner}} · {{Date}}</a:t>
+            </a:r>
+            <a:endParaRPr lang="en-US" sz="1200" dirty="0"/>
+          </a:p>
+        </p:txBody>
+      </p:sp>
+      <p:sp>
+        <p:nvSpPr>
+          <p:cNvPr id="9" name="Text 7"/>
+          <p:cNvSpPr/>
+          <p:nvPr/>
+        </p:nvSpPr>
+        <p:spPr>
+          <a:xfrm>
+            <a:off x="365760" y="457200"/>
+            <a:ext cx="1097280" cy="1097280"/>
+          </a:xfrm>
+          <a:prstGeom prst="rect">
+            <a:avLst/>
+          </a:prstGeom>
+          <a:noFill/>
+          <a:ln/>
+        </p:spPr>
+        <p:txBody>
+          <a:bodyPr wrap="square" rtlCol="0" anchor="ctr"/>
+          <a:lstStyle/>
+          <a:p>
+            <a:pPr indent="0" marL="0">
+              <a:buNone/>
+            </a:pPr>
+            <a:r>
+              <a:rPr lang="en-US" sz="5600" b="1" dirty="0">
+                <a:solidFill>
+                  <a:srgbClr val="4F6EF7"/>
+                </a:solidFill>
+                <a:latin typeface="Calibri" pitchFamily="34" charset="0"/>
+                <a:ea typeface="Calibri" pitchFamily="34" charset="-122"/>
+                <a:cs typeface="Calibri" pitchFamily="34" charset="-120"/>
+              </a:rPr>
+              <a:t>V</a:t>
+            </a:r>
+            <a:endParaRPr lang="en-US" sz="5600" dirty="0"/>
+          </a:p>
+        </p:txBody>
+      </p:sp>
+      <p:sp>
+        <p:nvSpPr>
+          <p:cNvPr id="10" name="Text 8"/>
+          <p:cNvSpPr/>
+          <p:nvPr/>
+        </p:nvSpPr>
+        <p:spPr>
+          <a:xfrm>
+            <a:off x="365760" y="5943600"/>
+            <a:ext cx="4023360" cy="365760"/>
+          </a:xfrm>
+          <a:prstGeom prst="rect">
+            <a:avLst/>
+          </a:prstGeom>
+          <a:noFill/>
+          <a:ln/>
+        </p:spPr>
+        <p:txBody>
+          <a:bodyPr wrap="square" rtlCol="0" anchor="ctr"/>
+          <a:lstStyle/>
+          <a:p>
+            <a:pPr indent="0" marL="0">
+              <a:buNone/>
+            </a:pPr>
+            <a:r>
               <a:rPr lang="en-US" sz="1100" dirty="0">
                 <a:solidFill>
                   <a:srgbClr val="8892B0"/>
                 </a:solidFill>
-              </a:rPr>
-              <a:t>Prepared with ViePilot · 2026</a:t>
+                <a:latin typeface="Calibri" pitchFamily="34" charset="0"/>
+                <a:ea typeface="Calibri" pitchFamily="34" charset="-122"/>
+                <a:cs typeface="Calibri" pitchFamily="34" charset="-120"/>
+              </a:rPr>
+              <a:t>ViePilot</a:t>
             </a:r>
             <a:endParaRPr lang="en-US" sz="1100" dirty="0"/>
           </a:p>
@@ -2104,7 +2306,27 @@
         <p:spPr>
           <a:xfrm>
             <a:off x="0" y="0"/>
-            <a:ext cx="12192000" cy="1005840"/>
+            <a:ext cx="109728" cy="6858000"/>
+          </a:xfrm>
+          <a:prstGeom prst="rect">
+            <a:avLst/>
+          </a:prstGeom>
+          <a:solidFill>
+            <a:srgbClr val="4F6EF7"/>
+          </a:solidFill>
+          <a:ln/>
+        </p:spPr>
+      </p:sp>
+      <p:sp>
+        <p:nvSpPr>
+          <p:cNvPr id="3" name="Shape 1"/>
+          <p:cNvSpPr/>
+          <p:nvPr/>
+        </p:nvSpPr>
+        <p:spPr>
+          <a:xfrm>
+            <a:off x="109728" y="0"/>
+            <a:ext cx="12079224" cy="914400"/>
           </a:xfrm>
           <a:prstGeom prst="rect">
             <a:avLst/>
@@ -2117,14 +2339,14 @@
       </p:sp>
       <p:sp>
         <p:nvSpPr>
-          <p:cNvPr id="3" name="Text 1"/>
-          <p:cNvSpPr/>
-          <p:nvPr/>
-        </p:nvSpPr>
-        <p:spPr>
-          <a:xfrm>
-            <a:off x="365760" y="164592"/>
-            <a:ext cx="10607040" cy="685800"/>
+          <p:cNvPr id="4" name="Text 2"/>
+          <p:cNvSpPr/>
+          <p:nvPr/>
+        </p:nvSpPr>
+        <p:spPr>
+          <a:xfrm>
+            <a:off x="347472" y="109728"/>
+            <a:ext cx="11612880" cy="694944"/>
           </a:xfrm>
           <a:prstGeom prst="rect">
             <a:avLst/>
@@ -2140,7 +2362,7 @@
               <a:buNone/>
             </a:pPr>
             <a:r>
-              <a:rPr lang="en-US" sz="2400" b="1" dirty="0">
+              <a:rPr lang="en-US" sz="2200" b="1" dirty="0">
                 <a:solidFill>
                   <a:srgbClr val="E8ECF4"/>
                 </a:solidFill>
@@ -2150,20 +2372,20 @@
               </a:rPr>
               <a:t>Integration Points</a:t>
             </a:r>
-            <a:endParaRPr lang="en-US" sz="2400" dirty="0"/>
-          </a:p>
-        </p:txBody>
-      </p:sp>
-      <p:sp>
-        <p:nvSpPr>
-          <p:cNvPr id="4" name="Text 2"/>
-          <p:cNvSpPr/>
-          <p:nvPr/>
-        </p:nvSpPr>
-        <p:spPr>
-          <a:xfrm>
-            <a:off x="457200" y="1188720"/>
-            <a:ext cx="10424160" cy="4754880"/>
+            <a:endParaRPr lang="en-US" sz="2200" dirty="0"/>
+          </a:p>
+        </p:txBody>
+      </p:sp>
+      <p:sp>
+        <p:nvSpPr>
+          <p:cNvPr id="5" name="Text 3"/>
+          <p:cNvSpPr/>
+          <p:nvPr/>
+        </p:nvSpPr>
+        <p:spPr>
+          <a:xfrm>
+            <a:off x="457200" y="1097280"/>
+            <a:ext cx="11430000" cy="5212080"/>
           </a:xfrm>
           <a:prstGeom prst="rect">
             <a:avLst/>
@@ -2175,12 +2397,13 @@
           <a:bodyPr wrap="square" rtlCol="0" anchor="t"/>
           <a:lstStyle/>
           <a:p>
-            <a:pPr marL="342900" indent="-342900">
-              <a:buSzPct val="100000"/>
-              <a:buChar char="•"/>
-            </a:pPr>
-            <a:r>
-              <a:rPr lang="en-US" sz="1600" dirty="0">
+            <a:pPr>
+              <a:spcAft>
+                <a:spcPts val="800"/>
+              </a:spcAft>
+            </a:pPr>
+            <a:r>
+              <a:rPr lang="en-US" sz="1500" dirty="0">
                 <a:solidFill>
                   <a:srgbClr val="E8ECF4"/>
                 </a:solidFill>
@@ -2188,17 +2411,18 @@
                 <a:ea typeface="Calibri" pitchFamily="34" charset="-122"/>
                 <a:cs typeface="Calibri" pitchFamily="34" charset="-120"/>
               </a:rPr>
-              <a:t>{{External API 1}}</a:t>
-            </a:r>
-            <a:endParaRPr lang="en-US" sz="1600" dirty="0"/>
-          </a:p>
-          <a:p>
-            <a:pPr marL="342900" indent="-342900">
-              <a:buSzPct val="100000"/>
-              <a:buChar char="•"/>
-            </a:pPr>
-            <a:r>
-              <a:rPr lang="en-US" sz="1600" dirty="0">
+              <a:t>{{External API 1}}: {{protocol, frequency, SLA expectation}}</a:t>
+            </a:r>
+            <a:endParaRPr lang="en-US" sz="1500" dirty="0"/>
+          </a:p>
+          <a:p>
+            <a:pPr>
+              <a:spcAft>
+                <a:spcPts val="800"/>
+              </a:spcAft>
+            </a:pPr>
+            <a:r>
+              <a:rPr lang="en-US" sz="1500" dirty="0">
                 <a:solidFill>
                   <a:srgbClr val="E8ECF4"/>
                 </a:solidFill>
@@ -2206,17 +2430,18 @@
                 <a:ea typeface="Calibri" pitchFamily="34" charset="-122"/>
                 <a:cs typeface="Calibri" pitchFamily="34" charset="-120"/>
               </a:rPr>
-              <a:t>{{External API 2}}</a:t>
-            </a:r>
-            <a:endParaRPr lang="en-US" sz="1600" dirty="0"/>
-          </a:p>
-          <a:p>
-            <a:pPr marL="342900" indent="-342900">
-              <a:buSzPct val="100000"/>
-              <a:buChar char="•"/>
-            </a:pPr>
-            <a:r>
-              <a:rPr lang="en-US" sz="1600" dirty="0">
+              <a:t>{{Internal service}}: {{sync/async, data contract}}</a:t>
+            </a:r>
+            <a:endParaRPr lang="en-US" sz="1500" dirty="0"/>
+          </a:p>
+          <a:p>
+            <a:pPr>
+              <a:spcAft>
+                <a:spcPts val="800"/>
+              </a:spcAft>
+            </a:pPr>
+            <a:r>
+              <a:rPr lang="en-US" sz="1500" dirty="0">
                 <a:solidFill>
                   <a:srgbClr val="E8ECF4"/>
                 </a:solidFill>
@@ -2224,9 +2449,9 @@
                 <a:ea typeface="Calibri" pitchFamily="34" charset="-122"/>
                 <a:cs typeface="Calibri" pitchFamily="34" charset="-120"/>
               </a:rPr>
-              <a:t>{{Internal services}}</a:t>
-            </a:r>
-            <a:endParaRPr lang="en-US" sz="1600" dirty="0"/>
+              <a:t>{{Third-party tool}}: {{purpose + dependency risk}}</a:t>
+            </a:r>
+            <a:endParaRPr lang="en-US" sz="1500" dirty="0"/>
           </a:p>
         </p:txBody>
       </p:sp>
@@ -2264,7 +2489,27 @@
         <p:spPr>
           <a:xfrm>
             <a:off x="0" y="0"/>
-            <a:ext cx="12192000" cy="1005840"/>
+            <a:ext cx="109728" cy="6858000"/>
+          </a:xfrm>
+          <a:prstGeom prst="rect">
+            <a:avLst/>
+          </a:prstGeom>
+          <a:solidFill>
+            <a:srgbClr val="4F6EF7"/>
+          </a:solidFill>
+          <a:ln/>
+        </p:spPr>
+      </p:sp>
+      <p:sp>
+        <p:nvSpPr>
+          <p:cNvPr id="3" name="Shape 1"/>
+          <p:cNvSpPr/>
+          <p:nvPr/>
+        </p:nvSpPr>
+        <p:spPr>
+          <a:xfrm>
+            <a:off x="109728" y="0"/>
+            <a:ext cx="12079224" cy="914400"/>
           </a:xfrm>
           <a:prstGeom prst="rect">
             <a:avLst/>
@@ -2277,14 +2522,14 @@
       </p:sp>
       <p:sp>
         <p:nvSpPr>
-          <p:cNvPr id="3" name="Text 1"/>
-          <p:cNvSpPr/>
-          <p:nvPr/>
-        </p:nvSpPr>
-        <p:spPr>
-          <a:xfrm>
-            <a:off x="365760" y="164592"/>
-            <a:ext cx="10607040" cy="685800"/>
+          <p:cNvPr id="4" name="Text 2"/>
+          <p:cNvSpPr/>
+          <p:nvPr/>
+        </p:nvSpPr>
+        <p:spPr>
+          <a:xfrm>
+            <a:off x="347472" y="109728"/>
+            <a:ext cx="11612880" cy="694944"/>
           </a:xfrm>
           <a:prstGeom prst="rect">
             <a:avLst/>
@@ -2300,7 +2545,7 @@
               <a:buNone/>
             </a:pPr>
             <a:r>
-              <a:rPr lang="en-US" sz="2400" b="1" dirty="0">
+              <a:rPr lang="en-US" sz="2200" b="1" dirty="0">
                 <a:solidFill>
                   <a:srgbClr val="E8ECF4"/>
                 </a:solidFill>
@@ -2310,20 +2555,20 @@
               </a:rPr>
               <a:t>Implementation Roadmap</a:t>
             </a:r>
-            <a:endParaRPr lang="en-US" sz="2400" dirty="0"/>
-          </a:p>
-        </p:txBody>
-      </p:sp>
-      <p:sp>
-        <p:nvSpPr>
-          <p:cNvPr id="4" name="Text 2"/>
-          <p:cNvSpPr/>
-          <p:nvPr/>
-        </p:nvSpPr>
-        <p:spPr>
-          <a:xfrm>
-            <a:off x="457200" y="1188720"/>
-            <a:ext cx="10424160" cy="4754880"/>
+            <a:endParaRPr lang="en-US" sz="2200" dirty="0"/>
+          </a:p>
+        </p:txBody>
+      </p:sp>
+      <p:sp>
+        <p:nvSpPr>
+          <p:cNvPr id="5" name="Text 3"/>
+          <p:cNvSpPr/>
+          <p:nvPr/>
+        </p:nvSpPr>
+        <p:spPr>
+          <a:xfrm>
+            <a:off x="457200" y="1097280"/>
+            <a:ext cx="11430000" cy="5212080"/>
           </a:xfrm>
           <a:prstGeom prst="rect">
             <a:avLst/>
@@ -2335,12 +2580,13 @@
           <a:bodyPr wrap="square" rtlCol="0" anchor="t"/>
           <a:lstStyle/>
           <a:p>
-            <a:pPr marL="342900" indent="-342900">
-              <a:buSzPct val="100000"/>
-              <a:buChar char="•"/>
-            </a:pPr>
-            <a:r>
-              <a:rPr lang="en-US" sz="1600" dirty="0">
+            <a:pPr>
+              <a:spcAft>
+                <a:spcPts val="800"/>
+              </a:spcAft>
+            </a:pPr>
+            <a:r>
+              <a:rPr lang="en-US" sz="1500" dirty="0">
                 <a:solidFill>
                   <a:srgbClr val="E8ECF4"/>
                 </a:solidFill>
@@ -2348,17 +2594,18 @@
                 <a:ea typeface="Calibri" pitchFamily="34" charset="-122"/>
                 <a:cs typeface="Calibri" pitchFamily="34" charset="-120"/>
               </a:rPr>
-              <a:t>Sprint 1: {{goal}}</a:t>
-            </a:r>
-            <a:endParaRPr lang="en-US" sz="1600" dirty="0"/>
-          </a:p>
-          <a:p>
-            <a:pPr marL="342900" indent="-342900">
-              <a:buSzPct val="100000"/>
-              <a:buChar char="•"/>
-            </a:pPr>
-            <a:r>
-              <a:rPr lang="en-US" sz="1600" dirty="0">
+              <a:t>Sprint 1–2: {{Foundation — infra, CI/CD, auth}}</a:t>
+            </a:r>
+            <a:endParaRPr lang="en-US" sz="1500" dirty="0"/>
+          </a:p>
+          <a:p>
+            <a:pPr>
+              <a:spcAft>
+                <a:spcPts val="800"/>
+              </a:spcAft>
+            </a:pPr>
+            <a:r>
+              <a:rPr lang="en-US" sz="1500" dirty="0">
                 <a:solidFill>
                   <a:srgbClr val="E8ECF4"/>
                 </a:solidFill>
@@ -2366,17 +2613,18 @@
                 <a:ea typeface="Calibri" pitchFamily="34" charset="-122"/>
                 <a:cs typeface="Calibri" pitchFamily="34" charset="-120"/>
               </a:rPr>
-              <a:t>Sprint 2: {{goal}}</a:t>
-            </a:r>
-            <a:endParaRPr lang="en-US" sz="1600" dirty="0"/>
-          </a:p>
-          <a:p>
-            <a:pPr marL="342900" indent="-342900">
-              <a:buSzPct val="100000"/>
-              <a:buChar char="•"/>
-            </a:pPr>
-            <a:r>
-              <a:rPr lang="en-US" sz="1600" dirty="0">
+              <a:t>Sprint 3–5: {{Core services — {{key features}}}}</a:t>
+            </a:r>
+            <a:endParaRPr lang="en-US" sz="1500" dirty="0"/>
+          </a:p>
+          <a:p>
+            <a:pPr>
+              <a:spcAft>
+                <a:spcPts val="800"/>
+              </a:spcAft>
+            </a:pPr>
+            <a:r>
+              <a:rPr lang="en-US" sz="1500" dirty="0">
                 <a:solidFill>
                   <a:srgbClr val="E8ECF4"/>
                 </a:solidFill>
@@ -2384,9 +2632,9 @@
                 <a:ea typeface="Calibri" pitchFamily="34" charset="-122"/>
                 <a:cs typeface="Calibri" pitchFamily="34" charset="-120"/>
               </a:rPr>
-              <a:t>Sprint 3: {{goal}}</a:t>
-            </a:r>
-            <a:endParaRPr lang="en-US" sz="1600" dirty="0"/>
+              <a:t>Sprint 6–7: {{Integration, load testing, hardening}}</a:t>
+            </a:r>
+            <a:endParaRPr lang="en-US" sz="1500" dirty="0"/>
           </a:p>
         </p:txBody>
       </p:sp>
@@ -2444,7 +2692,7 @@
         <p:spPr>
           <a:xfrm>
             <a:off x="0" y="0"/>
-            <a:ext cx="12192000" cy="73152"/>
+            <a:ext cx="12192000" cy="137160"/>
           </a:xfrm>
           <a:prstGeom prst="rect">
             <a:avLst/>
@@ -2457,14 +2705,34 @@
       </p:sp>
       <p:sp>
         <p:nvSpPr>
-          <p:cNvPr id="4" name="Text 2"/>
-          <p:cNvSpPr/>
-          <p:nvPr/>
-        </p:nvSpPr>
-        <p:spPr>
-          <a:xfrm>
-            <a:off x="457200" y="1371600"/>
-            <a:ext cx="10424160" cy="1280160"/>
+          <p:cNvPr id="4" name="Shape 2"/>
+          <p:cNvSpPr/>
+          <p:nvPr/>
+        </p:nvSpPr>
+        <p:spPr>
+          <a:xfrm>
+            <a:off x="0" y="6720840"/>
+            <a:ext cx="12192000" cy="137160"/>
+          </a:xfrm>
+          <a:prstGeom prst="rect">
+            <a:avLst/>
+          </a:prstGeom>
+          <a:solidFill>
+            <a:srgbClr val="4F6EF7"/>
+          </a:solidFill>
+          <a:ln/>
+        </p:spPr>
+      </p:sp>
+      <p:sp>
+        <p:nvSpPr>
+          <p:cNvPr id="5" name="Text 3"/>
+          <p:cNvSpPr/>
+          <p:nvPr/>
+        </p:nvSpPr>
+        <p:spPr>
+          <a:xfrm>
+            <a:off x="457200" y="1280160"/>
+            <a:ext cx="11338560" cy="457200"/>
           </a:xfrm>
           <a:prstGeom prst="rect">
             <a:avLst/>
@@ -2480,27 +2748,30 @@
               <a:buNone/>
             </a:pPr>
             <a:r>
-              <a:rPr lang="en-US" sz="4800" b="1" dirty="0">
-                <a:solidFill>
-                  <a:srgbClr val="FFFFFF"/>
-                </a:solidFill>
-              </a:rPr>
-              <a:t>Thank You</a:t>
-            </a:r>
-            <a:endParaRPr lang="en-US" sz="4800" dirty="0"/>
-          </a:p>
-        </p:txBody>
-      </p:sp>
-      <p:sp>
-        <p:nvSpPr>
-          <p:cNvPr id="5" name="Text 3"/>
-          <p:cNvSpPr/>
-          <p:nvPr/>
-        </p:nvSpPr>
-        <p:spPr>
-          <a:xfrm>
-            <a:off x="457200" y="2926080"/>
-            <a:ext cx="10424160" cy="731520"/>
+              <a:rPr lang="en-US" sz="1300" b="1" spc="200" kern="0" dirty="0">
+                <a:solidFill>
+                  <a:srgbClr val="4F6EF7"/>
+                </a:solidFill>
+                <a:latin typeface="Calibri" pitchFamily="34" charset="0"/>
+                <a:ea typeface="Calibri" pitchFamily="34" charset="-122"/>
+                <a:cs typeface="Calibri" pitchFamily="34" charset="-120"/>
+              </a:rPr>
+              <a:t>What's Next</a:t>
+            </a:r>
+            <a:endParaRPr lang="en-US" sz="1300" dirty="0"/>
+          </a:p>
+        </p:txBody>
+      </p:sp>
+      <p:sp>
+        <p:nvSpPr>
+          <p:cNvPr id="6" name="Text 4"/>
+          <p:cNvSpPr/>
+          <p:nvPr/>
+        </p:nvSpPr>
+        <p:spPr>
+          <a:xfrm>
+            <a:off x="914400" y="1920240"/>
+            <a:ext cx="10424160" cy="1828800"/>
           </a:xfrm>
           <a:prstGeom prst="rect">
             <a:avLst/>
@@ -2516,27 +2787,50 @@
               <a:buNone/>
             </a:pPr>
             <a:r>
-              <a:rPr lang="en-US" sz="2000" dirty="0">
-                <a:solidFill>
-                  <a:srgbClr val="8892B0"/>
-                </a:solidFill>
-              </a:rPr>
-              <a:t>Questions? Let's dive deeper into any component.</a:t>
-            </a:r>
-            <a:endParaRPr lang="en-US" sz="2000" dirty="0"/>
-          </a:p>
-        </p:txBody>
-      </p:sp>
-      <p:sp>
-        <p:nvSpPr>
-          <p:cNvPr id="6" name="Text 4"/>
-          <p:cNvSpPr/>
-          <p:nvPr/>
-        </p:nvSpPr>
-        <p:spPr>
-          <a:xfrm>
-            <a:off x="457200" y="3931920"/>
-            <a:ext cx="10424160" cy="365760"/>
+              <a:rPr lang="en-US" sz="3200" b="1" dirty="0">
+                <a:solidFill>
+                  <a:srgbClr val="FFFFFF"/>
+                </a:solidFill>
+                <a:latin typeface="Calibri" pitchFamily="34" charset="0"/>
+                <a:ea typeface="Calibri" pitchFamily="34" charset="-122"/>
+                <a:cs typeface="Calibri" pitchFamily="34" charset="-120"/>
+              </a:rPr>
+              <a:t>{{Questions? Let's schedule a technical deep-dive.}}</a:t>
+            </a:r>
+            <a:endParaRPr lang="en-US" sz="3200" dirty="0"/>
+          </a:p>
+        </p:txBody>
+      </p:sp>
+      <p:sp>
+        <p:nvSpPr>
+          <p:cNvPr id="7" name="Shape 5"/>
+          <p:cNvSpPr/>
+          <p:nvPr/>
+        </p:nvSpPr>
+        <p:spPr>
+          <a:xfrm>
+            <a:off x="4114800" y="3931920"/>
+            <a:ext cx="4023360" cy="36576"/>
+          </a:xfrm>
+          <a:prstGeom prst="rect">
+            <a:avLst/>
+          </a:prstGeom>
+          <a:solidFill>
+            <a:srgbClr val="4F6EF7"/>
+          </a:solidFill>
+          <a:ln/>
+        </p:spPr>
+      </p:sp>
+      <p:sp>
+        <p:nvSpPr>
+          <p:cNvPr id="8" name="Text 6"/>
+          <p:cNvSpPr/>
+          <p:nvPr/>
+        </p:nvSpPr>
+        <p:spPr>
+          <a:xfrm>
+            <a:off x="457200" y="4160520"/>
+            <a:ext cx="11338560" cy="411480"/>
           </a:xfrm>
           <a:prstGeom prst="rect">
             <a:avLst/>
@@ -2556,10 +2850,52 @@
                 <a:solidFill>
                   <a:srgbClr val="8892B0"/>
                 </a:solidFill>
-              </a:rPr>
-              <a:t>contact@example.com · viepilot.dev</a:t>
+                <a:latin typeface="Calibri" pitchFamily="34" charset="0"/>
+                <a:ea typeface="Calibri" pitchFamily="34" charset="-122"/>
+                <a:cs typeface="Calibri" pitchFamily="34" charset="-120"/>
+              </a:rPr>
+              <a:t>engineering@example.com  ·  GitHub: github.com/{{org}}</a:t>
             </a:r>
             <a:endParaRPr lang="en-US" sz="1300" dirty="0"/>
+          </a:p>
+        </p:txBody>
+      </p:sp>
+      <p:sp>
+        <p:nvSpPr>
+          <p:cNvPr id="9" name="Text 7"/>
+          <p:cNvSpPr/>
+          <p:nvPr/>
+        </p:nvSpPr>
+        <p:spPr>
+          <a:xfrm>
+            <a:off x="457200" y="6035040"/>
+            <a:ext cx="11338560" cy="320040"/>
+          </a:xfrm>
+          <a:prstGeom prst="rect">
+            <a:avLst/>
+          </a:prstGeom>
+          <a:noFill/>
+          <a:ln/>
+        </p:spPr>
+        <p:txBody>
+          <a:bodyPr wrap="square" rtlCol="0" anchor="ctr"/>
+          <a:lstStyle/>
+          <a:p>
+            <a:pPr algn="ctr" indent="0" marL="0">
+              <a:buNone/>
+            </a:pPr>
+            <a:r>
+              <a:rPr lang="en-US" sz="1000" dirty="0">
+                <a:solidFill>
+                  <a:srgbClr val="5A637A"/>
+                </a:solidFill>
+                <a:latin typeface="Calibri" pitchFamily="34" charset="0"/>
+                <a:ea typeface="Calibri" pitchFamily="34" charset="-122"/>
+                <a:cs typeface="Calibri" pitchFamily="34" charset="-120"/>
+              </a:rPr>
+              <a:t>Powered by ViePilot</a:t>
+            </a:r>
+            <a:endParaRPr lang="en-US" sz="1000" dirty="0"/>
           </a:p>
         </p:txBody>
       </p:sp>
@@ -2597,7 +2933,27 @@
         <p:spPr>
           <a:xfrm>
             <a:off x="0" y="0"/>
-            <a:ext cx="12192000" cy="1005840"/>
+            <a:ext cx="109728" cy="6858000"/>
+          </a:xfrm>
+          <a:prstGeom prst="rect">
+            <a:avLst/>
+          </a:prstGeom>
+          <a:solidFill>
+            <a:srgbClr val="4F6EF7"/>
+          </a:solidFill>
+          <a:ln/>
+        </p:spPr>
+      </p:sp>
+      <p:sp>
+        <p:nvSpPr>
+          <p:cNvPr id="3" name="Shape 1"/>
+          <p:cNvSpPr/>
+          <p:nvPr/>
+        </p:nvSpPr>
+        <p:spPr>
+          <a:xfrm>
+            <a:off x="109728" y="0"/>
+            <a:ext cx="12079224" cy="914400"/>
           </a:xfrm>
           <a:prstGeom prst="rect">
             <a:avLst/>
@@ -2610,14 +2966,14 @@
       </p:sp>
       <p:sp>
         <p:nvSpPr>
-          <p:cNvPr id="3" name="Text 1"/>
-          <p:cNvSpPr/>
-          <p:nvPr/>
-        </p:nvSpPr>
-        <p:spPr>
-          <a:xfrm>
-            <a:off x="365760" y="164592"/>
-            <a:ext cx="10607040" cy="685800"/>
+          <p:cNvPr id="4" name="Text 2"/>
+          <p:cNvSpPr/>
+          <p:nvPr/>
+        </p:nvSpPr>
+        <p:spPr>
+          <a:xfrm>
+            <a:off x="347472" y="109728"/>
+            <a:ext cx="11612880" cy="694944"/>
           </a:xfrm>
           <a:prstGeom prst="rect">
             <a:avLst/>
@@ -2633,7 +2989,7 @@
               <a:buNone/>
             </a:pPr>
             <a:r>
-              <a:rPr lang="en-US" sz="2400" b="1" dirty="0">
+              <a:rPr lang="en-US" sz="2200" b="1" dirty="0">
                 <a:solidFill>
                   <a:srgbClr val="E8ECF4"/>
                 </a:solidFill>
@@ -2643,20 +2999,20 @@
               </a:rPr>
               <a:t>Executive Summary</a:t>
             </a:r>
-            <a:endParaRPr lang="en-US" sz="2400" dirty="0"/>
-          </a:p>
-        </p:txBody>
-      </p:sp>
-      <p:sp>
-        <p:nvSpPr>
-          <p:cNvPr id="4" name="Text 2"/>
-          <p:cNvSpPr/>
-          <p:nvPr/>
-        </p:nvSpPr>
-        <p:spPr>
-          <a:xfrm>
-            <a:off x="457200" y="1188720"/>
-            <a:ext cx="10424160" cy="4754880"/>
+            <a:endParaRPr lang="en-US" sz="2200" dirty="0"/>
+          </a:p>
+        </p:txBody>
+      </p:sp>
+      <p:sp>
+        <p:nvSpPr>
+          <p:cNvPr id="5" name="Text 3"/>
+          <p:cNvSpPr/>
+          <p:nvPr/>
+        </p:nvSpPr>
+        <p:spPr>
+          <a:xfrm>
+            <a:off x="457200" y="1097280"/>
+            <a:ext cx="11430000" cy="5212080"/>
           </a:xfrm>
           <a:prstGeom prst="rect">
             <a:avLst/>
@@ -2668,12 +3024,13 @@
           <a:bodyPr wrap="square" rtlCol="0" anchor="t"/>
           <a:lstStyle/>
           <a:p>
-            <a:pPr marL="342900" indent="-342900">
-              <a:buSzPct val="100000"/>
-              <a:buChar char="•"/>
-            </a:pPr>
-            <a:r>
-              <a:rPr lang="en-US" sz="1600" dirty="0">
+            <a:pPr>
+              <a:spcAft>
+                <a:spcPts val="800"/>
+              </a:spcAft>
+            </a:pPr>
+            <a:r>
+              <a:rPr lang="en-US" sz="1500" dirty="0">
                 <a:solidFill>
                   <a:srgbClr val="E8ECF4"/>
                 </a:solidFill>
@@ -2681,17 +3038,18 @@
                 <a:ea typeface="Calibri" pitchFamily="34" charset="-122"/>
                 <a:cs typeface="Calibri" pitchFamily="34" charset="-120"/>
               </a:rPr>
-              <a:t>{{System purpose}}</a:t>
-            </a:r>
-            <a:endParaRPr lang="en-US" sz="1600" dirty="0"/>
-          </a:p>
-          <a:p>
-            <a:pPr marL="342900" indent="-342900">
-              <a:buSzPct val="100000"/>
-              <a:buChar char="•"/>
-            </a:pPr>
-            <a:r>
-              <a:rPr lang="en-US" sz="1600" dirty="0">
+              <a:t>{{System purpose: "Enables X to do Y at Z scale"}}</a:t>
+            </a:r>
+            <a:endParaRPr lang="en-US" sz="1500" dirty="0"/>
+          </a:p>
+          <a:p>
+            <a:pPr>
+              <a:spcAft>
+                <a:spcPts val="800"/>
+              </a:spcAft>
+            </a:pPr>
+            <a:r>
+              <a:rPr lang="en-US" sz="1500" dirty="0">
                 <a:solidFill>
                   <a:srgbClr val="E8ECF4"/>
                 </a:solidFill>
@@ -2699,17 +3057,18 @@
                 <a:ea typeface="Calibri" pitchFamily="34" charset="-122"/>
                 <a:cs typeface="Calibri" pitchFamily="34" charset="-120"/>
               </a:rPr>
-              <a:t>{{Key architectural decisions}}</a:t>
-            </a:r>
-            <a:endParaRPr lang="en-US" sz="1600" dirty="0"/>
-          </a:p>
-          <a:p>
-            <a:pPr marL="342900" indent="-342900">
-              <a:buSzPct val="100000"/>
-              <a:buChar char="•"/>
-            </a:pPr>
-            <a:r>
-              <a:rPr lang="en-US" sz="1600" dirty="0">
+              <a:t>{{Key architectural decision + rationale}}</a:t>
+            </a:r>
+            <a:endParaRPr lang="en-US" sz="1500" dirty="0"/>
+          </a:p>
+          <a:p>
+            <a:pPr>
+              <a:spcAft>
+                <a:spcPts val="800"/>
+              </a:spcAft>
+            </a:pPr>
+            <a:r>
+              <a:rPr lang="en-US" sz="1500" dirty="0">
                 <a:solidFill>
                   <a:srgbClr val="E8ECF4"/>
                 </a:solidFill>
@@ -2717,9 +3076,9 @@
                 <a:ea typeface="Calibri" pitchFamily="34" charset="-122"/>
                 <a:cs typeface="Calibri" pitchFamily="34" charset="-120"/>
               </a:rPr>
-              <a:t>{{Expected outcomes}}</a:t>
-            </a:r>
-            <a:endParaRPr lang="en-US" sz="1600" dirty="0"/>
+              <a:t>{{Expected outcome: performance target, cost reduction, or reliability gain}}</a:t>
+            </a:r>
+            <a:endParaRPr lang="en-US" sz="1500" dirty="0"/>
           </a:p>
         </p:txBody>
       </p:sp>
@@ -2757,7 +3116,27 @@
         <p:spPr>
           <a:xfrm>
             <a:off x="0" y="0"/>
-            <a:ext cx="12192000" cy="1005840"/>
+            <a:ext cx="109728" cy="6858000"/>
+          </a:xfrm>
+          <a:prstGeom prst="rect">
+            <a:avLst/>
+          </a:prstGeom>
+          <a:solidFill>
+            <a:srgbClr val="4F6EF7"/>
+          </a:solidFill>
+          <a:ln/>
+        </p:spPr>
+      </p:sp>
+      <p:sp>
+        <p:nvSpPr>
+          <p:cNvPr id="3" name="Shape 1"/>
+          <p:cNvSpPr/>
+          <p:nvPr/>
+        </p:nvSpPr>
+        <p:spPr>
+          <a:xfrm>
+            <a:off x="109728" y="0"/>
+            <a:ext cx="12079224" cy="914400"/>
           </a:xfrm>
           <a:prstGeom prst="rect">
             <a:avLst/>
@@ -2770,14 +3149,14 @@
       </p:sp>
       <p:sp>
         <p:nvSpPr>
-          <p:cNvPr id="3" name="Text 1"/>
-          <p:cNvSpPr/>
-          <p:nvPr/>
-        </p:nvSpPr>
-        <p:spPr>
-          <a:xfrm>
-            <a:off x="365760" y="164592"/>
-            <a:ext cx="10607040" cy="685800"/>
+          <p:cNvPr id="4" name="Text 2"/>
+          <p:cNvSpPr/>
+          <p:nvPr/>
+        </p:nvSpPr>
+        <p:spPr>
+          <a:xfrm>
+            <a:off x="347472" y="109728"/>
+            <a:ext cx="11612880" cy="694944"/>
           </a:xfrm>
           <a:prstGeom prst="rect">
             <a:avLst/>
@@ -2793,7 +3172,7 @@
               <a:buNone/>
             </a:pPr>
             <a:r>
-              <a:rPr lang="en-US" sz="2400" b="1" dirty="0">
+              <a:rPr lang="en-US" sz="2200" b="1" dirty="0">
                 <a:solidFill>
                   <a:srgbClr val="E8ECF4"/>
                 </a:solidFill>
@@ -2803,20 +3182,20 @@
               </a:rPr>
               <a:t>Problem Statement</a:t>
             </a:r>
-            <a:endParaRPr lang="en-US" sz="2400" dirty="0"/>
-          </a:p>
-        </p:txBody>
-      </p:sp>
-      <p:sp>
-        <p:nvSpPr>
-          <p:cNvPr id="4" name="Text 2"/>
-          <p:cNvSpPr/>
-          <p:nvPr/>
-        </p:nvSpPr>
-        <p:spPr>
-          <a:xfrm>
-            <a:off x="457200" y="1188720"/>
-            <a:ext cx="10424160" cy="4754880"/>
+            <a:endParaRPr lang="en-US" sz="2200" dirty="0"/>
+          </a:p>
+        </p:txBody>
+      </p:sp>
+      <p:sp>
+        <p:nvSpPr>
+          <p:cNvPr id="5" name="Text 3"/>
+          <p:cNvSpPr/>
+          <p:nvPr/>
+        </p:nvSpPr>
+        <p:spPr>
+          <a:xfrm>
+            <a:off x="457200" y="1097280"/>
+            <a:ext cx="11430000" cy="5212080"/>
           </a:xfrm>
           <a:prstGeom prst="rect">
             <a:avLst/>
@@ -2828,12 +3207,13 @@
           <a:bodyPr wrap="square" rtlCol="0" anchor="t"/>
           <a:lstStyle/>
           <a:p>
-            <a:pPr marL="342900" indent="-342900">
-              <a:buSzPct val="100000"/>
-              <a:buChar char="•"/>
-            </a:pPr>
-            <a:r>
-              <a:rPr lang="en-US" sz="1600" dirty="0">
+            <a:pPr>
+              <a:spcAft>
+                <a:spcPts val="800"/>
+              </a:spcAft>
+            </a:pPr>
+            <a:r>
+              <a:rPr lang="en-US" sz="1500" dirty="0">
                 <a:solidFill>
                   <a:srgbClr val="E8ECF4"/>
                 </a:solidFill>
@@ -2841,17 +3221,18 @@
                 <a:ea typeface="Calibri" pitchFamily="34" charset="-122"/>
                 <a:cs typeface="Calibri" pitchFamily="34" charset="-120"/>
               </a:rPr>
-              <a:t>{{Current limitations}}</a:t>
-            </a:r>
-            <a:endParaRPr lang="en-US" sz="1600" dirty="0"/>
-          </a:p>
-          <a:p>
-            <a:pPr marL="342900" indent="-342900">
-              <a:buSzPct val="100000"/>
-              <a:buChar char="•"/>
-            </a:pPr>
-            <a:r>
-              <a:rPr lang="en-US" sz="1600" dirty="0">
+              <a:t>{{Current limitation: "The existing system cannot handle X because Y"}}</a:t>
+            </a:r>
+            <a:endParaRPr lang="en-US" sz="1500" dirty="0"/>
+          </a:p>
+          <a:p>
+            <a:pPr>
+              <a:spcAft>
+                <a:spcPts val="800"/>
+              </a:spcAft>
+            </a:pPr>
+            <a:r>
+              <a:rPr lang="en-US" sz="1500" dirty="0">
                 <a:solidFill>
                   <a:srgbClr val="E8ECF4"/>
                 </a:solidFill>
@@ -2859,17 +3240,18 @@
                 <a:ea typeface="Calibri" pitchFamily="34" charset="-122"/>
                 <a:cs typeface="Calibri" pitchFamily="34" charset="-120"/>
               </a:rPr>
-              <a:t>{{Scale requirements}}</a:t>
-            </a:r>
-            <a:endParaRPr lang="en-US" sz="1600" dirty="0"/>
-          </a:p>
-          <a:p>
-            <a:pPr marL="342900" indent="-342900">
-              <a:buSzPct val="100000"/>
-              <a:buChar char="•"/>
-            </a:pPr>
-            <a:r>
-              <a:rPr lang="en-US" sz="1600" dirty="0">
+              <a:t>{{Scale requirement: throughput, latency, or data volume target}}</a:t>
+            </a:r>
+            <a:endParaRPr lang="en-US" sz="1500" dirty="0"/>
+          </a:p>
+          <a:p>
+            <a:pPr>
+              <a:spcAft>
+                <a:spcPts val="800"/>
+              </a:spcAft>
+            </a:pPr>
+            <a:r>
+              <a:rPr lang="en-US" sz="1500" dirty="0">
                 <a:solidFill>
                   <a:srgbClr val="E8ECF4"/>
                 </a:solidFill>
@@ -2877,9 +3259,9 @@
                 <a:ea typeface="Calibri" pitchFamily="34" charset="-122"/>
                 <a:cs typeface="Calibri" pitchFamily="34" charset="-120"/>
               </a:rPr>
-              <a:t>{{Technical constraints}}</a:t>
-            </a:r>
-            <a:endParaRPr lang="en-US" sz="1600" dirty="0"/>
+              <a:t>{{Constraint: budget, timeline, team size, or compliance requirement}}</a:t>
+            </a:r>
+            <a:endParaRPr lang="en-US" sz="1500" dirty="0"/>
           </a:p>
         </p:txBody>
       </p:sp>
@@ -2917,7 +3299,27 @@
         <p:spPr>
           <a:xfrm>
             <a:off x="0" y="0"/>
-            <a:ext cx="12192000" cy="1005840"/>
+            <a:ext cx="109728" cy="6858000"/>
+          </a:xfrm>
+          <a:prstGeom prst="rect">
+            <a:avLst/>
+          </a:prstGeom>
+          <a:solidFill>
+            <a:srgbClr val="4F6EF7"/>
+          </a:solidFill>
+          <a:ln/>
+        </p:spPr>
+      </p:sp>
+      <p:sp>
+        <p:nvSpPr>
+          <p:cNvPr id="3" name="Shape 1"/>
+          <p:cNvSpPr/>
+          <p:nvPr/>
+        </p:nvSpPr>
+        <p:spPr>
+          <a:xfrm>
+            <a:off x="109728" y="0"/>
+            <a:ext cx="12079224" cy="914400"/>
           </a:xfrm>
           <a:prstGeom prst="rect">
             <a:avLst/>
@@ -2930,14 +3332,14 @@
       </p:sp>
       <p:sp>
         <p:nvSpPr>
-          <p:cNvPr id="3" name="Text 1"/>
-          <p:cNvSpPr/>
-          <p:nvPr/>
-        </p:nvSpPr>
-        <p:spPr>
-          <a:xfrm>
-            <a:off x="365760" y="164592"/>
-            <a:ext cx="10607040" cy="685800"/>
+          <p:cNvPr id="4" name="Text 2"/>
+          <p:cNvSpPr/>
+          <p:nvPr/>
+        </p:nvSpPr>
+        <p:spPr>
+          <a:xfrm>
+            <a:off x="347472" y="109728"/>
+            <a:ext cx="11612880" cy="694944"/>
           </a:xfrm>
           <a:prstGeom prst="rect">
             <a:avLst/>
@@ -2953,7 +3355,7 @@
               <a:buNone/>
             </a:pPr>
             <a:r>
-              <a:rPr lang="en-US" sz="2400" b="1" dirty="0">
+              <a:rPr lang="en-US" sz="2200" b="1" dirty="0">
                 <a:solidFill>
                   <a:srgbClr val="E8ECF4"/>
                 </a:solidFill>
@@ -2963,20 +3365,20 @@
               </a:rPr>
               <a:t>Architecture Overview</a:t>
             </a:r>
-            <a:endParaRPr lang="en-US" sz="2400" dirty="0"/>
-          </a:p>
-        </p:txBody>
-      </p:sp>
-      <p:sp>
-        <p:nvSpPr>
-          <p:cNvPr id="4" name="Text 2"/>
-          <p:cNvSpPr/>
-          <p:nvPr/>
-        </p:nvSpPr>
-        <p:spPr>
-          <a:xfrm>
-            <a:off x="457200" y="1188720"/>
-            <a:ext cx="10424160" cy="4754880"/>
+            <a:endParaRPr lang="en-US" sz="2200" dirty="0"/>
+          </a:p>
+        </p:txBody>
+      </p:sp>
+      <p:sp>
+        <p:nvSpPr>
+          <p:cNvPr id="5" name="Text 3"/>
+          <p:cNvSpPr/>
+          <p:nvPr/>
+        </p:nvSpPr>
+        <p:spPr>
+          <a:xfrm>
+            <a:off x="457200" y="1097280"/>
+            <a:ext cx="11430000" cy="5212080"/>
           </a:xfrm>
           <a:prstGeom prst="rect">
             <a:avLst/>
@@ -2988,12 +3390,13 @@
           <a:bodyPr wrap="square" rtlCol="0" anchor="t"/>
           <a:lstStyle/>
           <a:p>
-            <a:pPr marL="342900" indent="-342900">
-              <a:buSzPct val="100000"/>
-              <a:buChar char="•"/>
-            </a:pPr>
-            <a:r>
-              <a:rPr lang="en-US" sz="1600" dirty="0">
+            <a:pPr>
+              <a:spcAft>
+                <a:spcPts val="800"/>
+              </a:spcAft>
+            </a:pPr>
+            <a:r>
+              <a:rPr lang="en-US" sz="1500" dirty="0">
                 <a:solidFill>
                   <a:srgbClr val="E8ECF4"/>
                 </a:solidFill>
@@ -3001,17 +3404,18 @@
                 <a:ea typeface="Calibri" pitchFamily="34" charset="-122"/>
                 <a:cs typeface="Calibri" pitchFamily="34" charset="-120"/>
               </a:rPr>
-              <a:t>{{High-level diagram description}}</a:t>
-            </a:r>
-            <a:endParaRPr lang="en-US" sz="1600" dirty="0"/>
-          </a:p>
-          <a:p>
-            <a:pPr marL="342900" indent="-342900">
-              <a:buSzPct val="100000"/>
-              <a:buChar char="•"/>
-            </a:pPr>
-            <a:r>
-              <a:rPr lang="en-US" sz="1600" dirty="0">
+              <a:t>{{Layer 1 (e.g. Presentation)}} → {{Layer 2 (e.g. API Gateway)}} → {{Layer 3 (e.g. Services)}}</a:t>
+            </a:r>
+            <a:endParaRPr lang="en-US" sz="1500" dirty="0"/>
+          </a:p>
+          <a:p>
+            <a:pPr>
+              <a:spcAft>
+                <a:spcPts val="800"/>
+              </a:spcAft>
+            </a:pPr>
+            <a:r>
+              <a:rPr lang="en-US" sz="1500" dirty="0">
                 <a:solidFill>
                   <a:srgbClr val="E8ECF4"/>
                 </a:solidFill>
@@ -3019,17 +3423,18 @@
                 <a:ea typeface="Calibri" pitchFamily="34" charset="-122"/>
                 <a:cs typeface="Calibri" pitchFamily="34" charset="-120"/>
               </a:rPr>
-              <a:t>{{Core components}}</a:t>
-            </a:r>
-            <a:endParaRPr lang="en-US" sz="1600" dirty="0"/>
-          </a:p>
-          <a:p>
-            <a:pPr marL="342900" indent="-342900">
-              <a:buSzPct val="100000"/>
-              <a:buChar char="•"/>
-            </a:pPr>
-            <a:r>
-              <a:rPr lang="en-US" sz="1600" dirty="0">
+              <a:t>{{Core architectural pattern: microservices / event-driven / serverless}}</a:t>
+            </a:r>
+            <a:endParaRPr lang="en-US" sz="1500" dirty="0"/>
+          </a:p>
+          <a:p>
+            <a:pPr>
+              <a:spcAft>
+                <a:spcPts val="800"/>
+              </a:spcAft>
+            </a:pPr>
+            <a:r>
+              <a:rPr lang="en-US" sz="1500" dirty="0">
                 <a:solidFill>
                   <a:srgbClr val="E8ECF4"/>
                 </a:solidFill>
@@ -3037,9 +3442,9 @@
                 <a:ea typeface="Calibri" pitchFamily="34" charset="-122"/>
                 <a:cs typeface="Calibri" pitchFamily="34" charset="-120"/>
               </a:rPr>
-              <a:t>{{System boundaries}}</a:t>
-            </a:r>
-            <a:endParaRPr lang="en-US" sz="1600" dirty="0"/>
+              <a:t>{{Key infrastructure: cloud provider, orchestration, data store}}</a:t>
+            </a:r>
+            <a:endParaRPr lang="en-US" sz="1500" dirty="0"/>
           </a:p>
         </p:txBody>
       </p:sp>
@@ -3077,7 +3482,7 @@
         <p:spPr>
           <a:xfrm>
             <a:off x="0" y="0"/>
-            <a:ext cx="12192000" cy="1005840"/>
+            <a:ext cx="12192000" cy="914400"/>
           </a:xfrm>
           <a:prstGeom prst="rect">
             <a:avLst/>
@@ -3096,8 +3501,8 @@
         </p:nvSpPr>
         <p:spPr>
           <a:xfrm>
-            <a:off x="365760" y="164592"/>
-            <a:ext cx="10607040" cy="685800"/>
+            <a:off x="347472" y="109728"/>
+            <a:ext cx="11612880" cy="694944"/>
           </a:xfrm>
           <a:prstGeom prst="rect">
             <a:avLst/>
@@ -3113,7 +3518,7 @@
               <a:buNone/>
             </a:pPr>
             <a:r>
-              <a:rPr lang="en-US" sz="2400" b="1" dirty="0">
+              <a:rPr lang="en-US" sz="2200" b="1" dirty="0">
                 <a:solidFill>
                   <a:srgbClr val="E8ECF4"/>
                 </a:solidFill>
@@ -3123,20 +3528,40 @@
               </a:rPr>
               <a:t>Component Breakdown</a:t>
             </a:r>
-            <a:endParaRPr lang="en-US" sz="2400" dirty="0"/>
-          </a:p>
-        </p:txBody>
-      </p:sp>
-      <p:sp>
-        <p:nvSpPr>
-          <p:cNvPr id="4" name="Text 2"/>
-          <p:cNvSpPr/>
-          <p:nvPr/>
-        </p:nvSpPr>
-        <p:spPr>
-          <a:xfrm>
-            <a:off x="457200" y="1188720"/>
-            <a:ext cx="10424160" cy="4754880"/>
+            <a:endParaRPr lang="en-US" sz="2200" dirty="0"/>
+          </a:p>
+        </p:txBody>
+      </p:sp>
+      <p:sp>
+        <p:nvSpPr>
+          <p:cNvPr id="4" name="Shape 2"/>
+          <p:cNvSpPr/>
+          <p:nvPr/>
+        </p:nvSpPr>
+        <p:spPr>
+          <a:xfrm>
+            <a:off x="5989320" y="1051560"/>
+            <a:ext cx="36576" cy="5303520"/>
+          </a:xfrm>
+          <a:prstGeom prst="rect">
+            <a:avLst/>
+          </a:prstGeom>
+          <a:solidFill>
+            <a:srgbClr val="5A637A"/>
+          </a:solidFill>
+          <a:ln/>
+        </p:spPr>
+      </p:sp>
+      <p:sp>
+        <p:nvSpPr>
+          <p:cNvPr id="5" name="Text 3"/>
+          <p:cNvSpPr/>
+          <p:nvPr/>
+        </p:nvSpPr>
+        <p:spPr>
+          <a:xfrm>
+            <a:off x="347472" y="1051560"/>
+            <a:ext cx="5486400" cy="411480"/>
           </a:xfrm>
           <a:prstGeom prst="rect">
             <a:avLst/>
@@ -3145,15 +3570,57 @@
           <a:ln/>
         </p:spPr>
         <p:txBody>
+          <a:bodyPr wrap="square" rtlCol="0" anchor="ctr"/>
+          <a:lstStyle/>
+          <a:p>
+            <a:pPr indent="0" marL="0">
+              <a:buNone/>
+            </a:pPr>
+            <a:r>
+              <a:rPr lang="en-US" sz="1300" b="1" dirty="0">
+                <a:solidFill>
+                  <a:srgbClr val="4F6EF7"/>
+                </a:solidFill>
+                <a:latin typeface="Calibri" pitchFamily="34" charset="0"/>
+                <a:ea typeface="Calibri" pitchFamily="34" charset="-122"/>
+                <a:cs typeface="Calibri" pitchFamily="34" charset="-120"/>
+              </a:rPr>
+              <a:t>Frontend / Client</a:t>
+            </a:r>
+            <a:endParaRPr lang="en-US" sz="1300" dirty="0"/>
+          </a:p>
+        </p:txBody>
+      </p:sp>
+      <p:sp>
+        <p:nvSpPr>
+          <p:cNvPr id="6" name="Text 4"/>
+          <p:cNvSpPr/>
+          <p:nvPr/>
+        </p:nvSpPr>
+        <p:spPr>
+          <a:xfrm>
+            <a:off x="347472" y="1554480"/>
+            <a:ext cx="5486400" cy="4572000"/>
+          </a:xfrm>
+          <a:prstGeom prst="rect">
+            <a:avLst/>
+          </a:prstGeom>
+          <a:noFill/>
+          <a:ln/>
+        </p:spPr>
+        <p:txBody>
           <a:bodyPr wrap="square" rtlCol="0" anchor="t"/>
           <a:lstStyle/>
           <a:p>
             <a:pPr marL="342900" indent="-342900">
+              <a:spcAft>
+                <a:spcPts val="700"/>
+              </a:spcAft>
               <a:buSzPct val="100000"/>
               <a:buChar char="•"/>
             </a:pPr>
             <a:r>
-              <a:rPr lang="en-US" sz="1600" dirty="0">
+              <a:rPr lang="en-US" sz="1400" dirty="0">
                 <a:solidFill>
                   <a:srgbClr val="E8ECF4"/>
                 </a:solidFill>
@@ -3161,17 +3628,20 @@
                 <a:ea typeface="Calibri" pitchFamily="34" charset="-122"/>
                 <a:cs typeface="Calibri" pitchFamily="34" charset="-120"/>
               </a:rPr>
-              <a:t>{{Component 1}}: {{responsibility}}</a:t>
-            </a:r>
-            <a:endParaRPr lang="en-US" sz="1600" dirty="0"/>
+              <a:t>{{Component A}} — {{responsibility}}</a:t>
+            </a:r>
+            <a:endParaRPr lang="en-US" sz="1400" dirty="0"/>
           </a:p>
           <a:p>
             <a:pPr marL="342900" indent="-342900">
+              <a:spcAft>
+                <a:spcPts val="700"/>
+              </a:spcAft>
               <a:buSzPct val="100000"/>
               <a:buChar char="•"/>
             </a:pPr>
             <a:r>
-              <a:rPr lang="en-US" sz="1600" dirty="0">
+              <a:rPr lang="en-US" sz="1400" dirty="0">
                 <a:solidFill>
                   <a:srgbClr val="E8ECF4"/>
                 </a:solidFill>
@@ -3179,17 +3649,20 @@
                 <a:ea typeface="Calibri" pitchFamily="34" charset="-122"/>
                 <a:cs typeface="Calibri" pitchFamily="34" charset="-120"/>
               </a:rPr>
-              <a:t>{{Component 2}}: {{responsibility}}</a:t>
-            </a:r>
-            <a:endParaRPr lang="en-US" sz="1600" dirty="0"/>
+              <a:t>{{Component B}} — {{responsibility}}</a:t>
+            </a:r>
+            <a:endParaRPr lang="en-US" sz="1400" dirty="0"/>
           </a:p>
           <a:p>
             <a:pPr marL="342900" indent="-342900">
+              <a:spcAft>
+                <a:spcPts val="700"/>
+              </a:spcAft>
               <a:buSzPct val="100000"/>
               <a:buChar char="•"/>
             </a:pPr>
             <a:r>
-              <a:rPr lang="en-US" sz="1600" dirty="0">
+              <a:rPr lang="en-US" sz="1400" dirty="0">
                 <a:solidFill>
                   <a:srgbClr val="E8ECF4"/>
                 </a:solidFill>
@@ -3197,9 +3670,133 @@
                 <a:ea typeface="Calibri" pitchFamily="34" charset="-122"/>
                 <a:cs typeface="Calibri" pitchFamily="34" charset="-120"/>
               </a:rPr>
-              <a:t>{{Component 3}}: {{responsibility}}</a:t>
-            </a:r>
-            <a:endParaRPr lang="en-US" sz="1600" dirty="0"/>
+              <a:t>{{State management: approach}}</a:t>
+            </a:r>
+            <a:endParaRPr lang="en-US" sz="1400" dirty="0"/>
+          </a:p>
+        </p:txBody>
+      </p:sp>
+      <p:sp>
+        <p:nvSpPr>
+          <p:cNvPr id="7" name="Text 5"/>
+          <p:cNvSpPr/>
+          <p:nvPr/>
+        </p:nvSpPr>
+        <p:spPr>
+          <a:xfrm>
+            <a:off x="6309360" y="1051560"/>
+            <a:ext cx="5486400" cy="411480"/>
+          </a:xfrm>
+          <a:prstGeom prst="rect">
+            <a:avLst/>
+          </a:prstGeom>
+          <a:noFill/>
+          <a:ln/>
+        </p:spPr>
+        <p:txBody>
+          <a:bodyPr wrap="square" rtlCol="0" anchor="ctr"/>
+          <a:lstStyle/>
+          <a:p>
+            <a:pPr indent="0" marL="0">
+              <a:buNone/>
+            </a:pPr>
+            <a:r>
+              <a:rPr lang="en-US" sz="1300" b="1" dirty="0">
+                <a:solidFill>
+                  <a:srgbClr val="4F6EF7"/>
+                </a:solidFill>
+                <a:latin typeface="Calibri" pitchFamily="34" charset="0"/>
+                <a:ea typeface="Calibri" pitchFamily="34" charset="-122"/>
+                <a:cs typeface="Calibri" pitchFamily="34" charset="-120"/>
+              </a:rPr>
+              <a:t>Backend / Services</a:t>
+            </a:r>
+            <a:endParaRPr lang="en-US" sz="1300" dirty="0"/>
+          </a:p>
+        </p:txBody>
+      </p:sp>
+      <p:sp>
+        <p:nvSpPr>
+          <p:cNvPr id="8" name="Text 6"/>
+          <p:cNvSpPr/>
+          <p:nvPr/>
+        </p:nvSpPr>
+        <p:spPr>
+          <a:xfrm>
+            <a:off x="6309360" y="1554480"/>
+            <a:ext cx="5486400" cy="4572000"/>
+          </a:xfrm>
+          <a:prstGeom prst="rect">
+            <a:avLst/>
+          </a:prstGeom>
+          <a:noFill/>
+          <a:ln/>
+        </p:spPr>
+        <p:txBody>
+          <a:bodyPr wrap="square" rtlCol="0" anchor="t"/>
+          <a:lstStyle/>
+          <a:p>
+            <a:pPr marL="342900" indent="-342900">
+              <a:spcAft>
+                <a:spcPts val="700"/>
+              </a:spcAft>
+              <a:buSzPct val="100000"/>
+              <a:buChar char="•"/>
+            </a:pPr>
+            <a:r>
+              <a:rPr lang="en-US" sz="1400" dirty="0">
+                <a:solidFill>
+                  <a:srgbClr val="E8ECF4"/>
+                </a:solidFill>
+                <a:latin typeface="Calibri" pitchFamily="34" charset="0"/>
+                <a:ea typeface="Calibri" pitchFamily="34" charset="-122"/>
+                <a:cs typeface="Calibri" pitchFamily="34" charset="-120"/>
+              </a:rPr>
+              <a:t>{{Service X}} — {{responsibility}}</a:t>
+            </a:r>
+            <a:endParaRPr lang="en-US" sz="1400" dirty="0"/>
+          </a:p>
+          <a:p>
+            <a:pPr marL="342900" indent="-342900">
+              <a:spcAft>
+                <a:spcPts val="700"/>
+              </a:spcAft>
+              <a:buSzPct val="100000"/>
+              <a:buChar char="•"/>
+            </a:pPr>
+            <a:r>
+              <a:rPr lang="en-US" sz="1400" dirty="0">
+                <a:solidFill>
+                  <a:srgbClr val="E8ECF4"/>
+                </a:solidFill>
+                <a:latin typeface="Calibri" pitchFamily="34" charset="0"/>
+                <a:ea typeface="Calibri" pitchFamily="34" charset="-122"/>
+                <a:cs typeface="Calibri" pitchFamily="34" charset="-120"/>
+              </a:rPr>
+              <a:t>{{Service Y}} — {{responsibility}}</a:t>
+            </a:r>
+            <a:endParaRPr lang="en-US" sz="1400" dirty="0"/>
+          </a:p>
+          <a:p>
+            <a:pPr marL="342900" indent="-342900">
+              <a:spcAft>
+                <a:spcPts val="700"/>
+              </a:spcAft>
+              <a:buSzPct val="100000"/>
+              <a:buChar char="•"/>
+            </a:pPr>
+            <a:r>
+              <a:rPr lang="en-US" sz="1400" dirty="0">
+                <a:solidFill>
+                  <a:srgbClr val="E8ECF4"/>
+                </a:solidFill>
+                <a:latin typeface="Calibri" pitchFamily="34" charset="0"/>
+                <a:ea typeface="Calibri" pitchFamily="34" charset="-122"/>
+                <a:cs typeface="Calibri" pitchFamily="34" charset="-120"/>
+              </a:rPr>
+              <a:t>{{Data layer: type + rationale}}</a:t>
+            </a:r>
+            <a:endParaRPr lang="en-US" sz="1400" dirty="0"/>
           </a:p>
         </p:txBody>
       </p:sp>
@@ -3237,7 +3834,27 @@
         <p:spPr>
           <a:xfrm>
             <a:off x="0" y="0"/>
-            <a:ext cx="12192000" cy="1005840"/>
+            <a:ext cx="109728" cy="6858000"/>
+          </a:xfrm>
+          <a:prstGeom prst="rect">
+            <a:avLst/>
+          </a:prstGeom>
+          <a:solidFill>
+            <a:srgbClr val="4F6EF7"/>
+          </a:solidFill>
+          <a:ln/>
+        </p:spPr>
+      </p:sp>
+      <p:sp>
+        <p:nvSpPr>
+          <p:cNvPr id="3" name="Shape 1"/>
+          <p:cNvSpPr/>
+          <p:nvPr/>
+        </p:nvSpPr>
+        <p:spPr>
+          <a:xfrm>
+            <a:off x="109728" y="0"/>
+            <a:ext cx="12079224" cy="914400"/>
           </a:xfrm>
           <a:prstGeom prst="rect">
             <a:avLst/>
@@ -3250,14 +3867,14 @@
       </p:sp>
       <p:sp>
         <p:nvSpPr>
-          <p:cNvPr id="3" name="Text 1"/>
-          <p:cNvSpPr/>
-          <p:nvPr/>
-        </p:nvSpPr>
-        <p:spPr>
-          <a:xfrm>
-            <a:off x="365760" y="164592"/>
-            <a:ext cx="10607040" cy="685800"/>
+          <p:cNvPr id="4" name="Text 2"/>
+          <p:cNvSpPr/>
+          <p:nvPr/>
+        </p:nvSpPr>
+        <p:spPr>
+          <a:xfrm>
+            <a:off x="347472" y="109728"/>
+            <a:ext cx="11612880" cy="694944"/>
           </a:xfrm>
           <a:prstGeom prst="rect">
             <a:avLst/>
@@ -3273,7 +3890,7 @@
               <a:buNone/>
             </a:pPr>
             <a:r>
-              <a:rPr lang="en-US" sz="2400" b="1" dirty="0">
+              <a:rPr lang="en-US" sz="2200" b="1" dirty="0">
                 <a:solidFill>
                   <a:srgbClr val="E8ECF4"/>
                 </a:solidFill>
@@ -3283,20 +3900,20 @@
               </a:rPr>
               <a:t>Data Flow</a:t>
             </a:r>
-            <a:endParaRPr lang="en-US" sz="2400" dirty="0"/>
-          </a:p>
-        </p:txBody>
-      </p:sp>
-      <p:sp>
-        <p:nvSpPr>
-          <p:cNvPr id="4" name="Text 2"/>
-          <p:cNvSpPr/>
-          <p:nvPr/>
-        </p:nvSpPr>
-        <p:spPr>
-          <a:xfrm>
-            <a:off x="457200" y="1188720"/>
-            <a:ext cx="10424160" cy="4754880"/>
+            <a:endParaRPr lang="en-US" sz="2200" dirty="0"/>
+          </a:p>
+        </p:txBody>
+      </p:sp>
+      <p:sp>
+        <p:nvSpPr>
+          <p:cNvPr id="5" name="Text 3"/>
+          <p:cNvSpPr/>
+          <p:nvPr/>
+        </p:nvSpPr>
+        <p:spPr>
+          <a:xfrm>
+            <a:off x="457200" y="1097280"/>
+            <a:ext cx="11430000" cy="5212080"/>
           </a:xfrm>
           <a:prstGeom prst="rect">
             <a:avLst/>
@@ -3308,12 +3925,13 @@
           <a:bodyPr wrap="square" rtlCol="0" anchor="t"/>
           <a:lstStyle/>
           <a:p>
-            <a:pPr marL="342900" indent="-342900">
-              <a:buSzPct val="100000"/>
-              <a:buChar char="•"/>
-            </a:pPr>
-            <a:r>
-              <a:rPr lang="en-US" sz="1600" dirty="0">
+            <a:pPr>
+              <a:spcAft>
+                <a:spcPts val="800"/>
+              </a:spcAft>
+            </a:pPr>
+            <a:r>
+              <a:rPr lang="en-US" sz="1500" dirty="0">
                 <a:solidFill>
                   <a:srgbClr val="E8ECF4"/>
                 </a:solidFill>
@@ -3321,17 +3939,18 @@
                 <a:ea typeface="Calibri" pitchFamily="34" charset="-122"/>
                 <a:cs typeface="Calibri" pitchFamily="34" charset="-120"/>
               </a:rPr>
-              <a:t>{{Input sources}}</a:t>
-            </a:r>
-            <a:endParaRPr lang="en-US" sz="1600" dirty="0"/>
-          </a:p>
-          <a:p>
-            <a:pPr marL="342900" indent="-342900">
-              <a:buSzPct val="100000"/>
-              <a:buChar char="•"/>
-            </a:pPr>
-            <a:r>
-              <a:rPr lang="en-US" sz="1600" dirty="0">
+              <a:t>Input: {{Source}} → {{Processing step 1}} → {{Processing step 2}}</a:t>
+            </a:r>
+            <a:endParaRPr lang="en-US" sz="1500" dirty="0"/>
+          </a:p>
+          <a:p>
+            <a:pPr>
+              <a:spcAft>
+                <a:spcPts val="800"/>
+              </a:spcAft>
+            </a:pPr>
+            <a:r>
+              <a:rPr lang="en-US" sz="1500" dirty="0">
                 <a:solidFill>
                   <a:srgbClr val="E8ECF4"/>
                 </a:solidFill>
@@ -3339,17 +3958,18 @@
                 <a:ea typeface="Calibri" pitchFamily="34" charset="-122"/>
                 <a:cs typeface="Calibri" pitchFamily="34" charset="-120"/>
               </a:rPr>
-              <a:t>{{Processing pipeline}}</a:t>
-            </a:r>
-            <a:endParaRPr lang="en-US" sz="1600" dirty="0"/>
-          </a:p>
-          <a:p>
-            <a:pPr marL="342900" indent="-342900">
-              <a:buSzPct val="100000"/>
-              <a:buChar char="•"/>
-            </a:pPr>
-            <a:r>
-              <a:rPr lang="en-US" sz="1600" dirty="0">
+              <a:t>Storage: {{What is persisted, where, and why}}</a:t>
+            </a:r>
+            <a:endParaRPr lang="en-US" sz="1500" dirty="0"/>
+          </a:p>
+          <a:p>
+            <a:pPr>
+              <a:spcAft>
+                <a:spcPts val="800"/>
+              </a:spcAft>
+            </a:pPr>
+            <a:r>
+              <a:rPr lang="en-US" sz="1500" dirty="0">
                 <a:solidFill>
                   <a:srgbClr val="E8ECF4"/>
                 </a:solidFill>
@@ -3357,9 +3977,9 @@
                 <a:ea typeface="Calibri" pitchFamily="34" charset="-122"/>
                 <a:cs typeface="Calibri" pitchFamily="34" charset="-120"/>
               </a:rPr>
-              <a:t>{{Output / consumers}}</a:t>
-            </a:r>
-            <a:endParaRPr lang="en-US" sz="1600" dirty="0"/>
+              <a:t>Output: {{Consumers / downstream systems / APIs exposed}}</a:t>
+            </a:r>
+            <a:endParaRPr lang="en-US" sz="1500" dirty="0"/>
           </a:p>
         </p:txBody>
       </p:sp>
@@ -3397,7 +4017,27 @@
         <p:spPr>
           <a:xfrm>
             <a:off x="0" y="0"/>
-            <a:ext cx="12192000" cy="1005840"/>
+            <a:ext cx="109728" cy="6858000"/>
+          </a:xfrm>
+          <a:prstGeom prst="rect">
+            <a:avLst/>
+          </a:prstGeom>
+          <a:solidFill>
+            <a:srgbClr val="4F6EF7"/>
+          </a:solidFill>
+          <a:ln/>
+        </p:spPr>
+      </p:sp>
+      <p:sp>
+        <p:nvSpPr>
+          <p:cNvPr id="3" name="Shape 1"/>
+          <p:cNvSpPr/>
+          <p:nvPr/>
+        </p:nvSpPr>
+        <p:spPr>
+          <a:xfrm>
+            <a:off x="109728" y="0"/>
+            <a:ext cx="12079224" cy="914400"/>
           </a:xfrm>
           <a:prstGeom prst="rect">
             <a:avLst/>
@@ -3410,14 +4050,14 @@
       </p:sp>
       <p:sp>
         <p:nvSpPr>
-          <p:cNvPr id="3" name="Text 1"/>
-          <p:cNvSpPr/>
-          <p:nvPr/>
-        </p:nvSpPr>
-        <p:spPr>
-          <a:xfrm>
-            <a:off x="365760" y="164592"/>
-            <a:ext cx="10607040" cy="685800"/>
+          <p:cNvPr id="4" name="Text 2"/>
+          <p:cNvSpPr/>
+          <p:nvPr/>
+        </p:nvSpPr>
+        <p:spPr>
+          <a:xfrm>
+            <a:off x="347472" y="109728"/>
+            <a:ext cx="11612880" cy="694944"/>
           </a:xfrm>
           <a:prstGeom prst="rect">
             <a:avLst/>
@@ -3433,7 +4073,7 @@
               <a:buNone/>
             </a:pPr>
             <a:r>
-              <a:rPr lang="en-US" sz="2400" b="1" dirty="0">
+              <a:rPr lang="en-US" sz="2200" b="1" dirty="0">
                 <a:solidFill>
                   <a:srgbClr val="E8ECF4"/>
                 </a:solidFill>
@@ -3443,20 +4083,20 @@
               </a:rPr>
               <a:t>Tech Stack</a:t>
             </a:r>
-            <a:endParaRPr lang="en-US" sz="2400" dirty="0"/>
-          </a:p>
-        </p:txBody>
-      </p:sp>
-      <p:sp>
-        <p:nvSpPr>
-          <p:cNvPr id="4" name="Text 2"/>
-          <p:cNvSpPr/>
-          <p:nvPr/>
-        </p:nvSpPr>
-        <p:spPr>
-          <a:xfrm>
-            <a:off x="457200" y="1188720"/>
-            <a:ext cx="10424160" cy="4754880"/>
+            <a:endParaRPr lang="en-US" sz="2200" dirty="0"/>
+          </a:p>
+        </p:txBody>
+      </p:sp>
+      <p:sp>
+        <p:nvSpPr>
+          <p:cNvPr id="5" name="Text 3"/>
+          <p:cNvSpPr/>
+          <p:nvPr/>
+        </p:nvSpPr>
+        <p:spPr>
+          <a:xfrm>
+            <a:off x="457200" y="1097280"/>
+            <a:ext cx="11430000" cy="5212080"/>
           </a:xfrm>
           <a:prstGeom prst="rect">
             <a:avLst/>
@@ -3468,12 +4108,13 @@
           <a:bodyPr wrap="square" rtlCol="0" anchor="t"/>
           <a:lstStyle/>
           <a:p>
-            <a:pPr marL="342900" indent="-342900">
-              <a:buSzPct val="100000"/>
-              <a:buChar char="•"/>
-            </a:pPr>
-            <a:r>
-              <a:rPr lang="en-US" sz="1600" dirty="0">
+            <a:pPr>
+              <a:spcAft>
+                <a:spcPts val="800"/>
+              </a:spcAft>
+            </a:pPr>
+            <a:r>
+              <a:rPr lang="en-US" sz="1500" dirty="0">
                 <a:solidFill>
                   <a:srgbClr val="E8ECF4"/>
                 </a:solidFill>
@@ -3481,17 +4122,18 @@
                 <a:ea typeface="Calibri" pitchFamily="34" charset="-122"/>
                 <a:cs typeface="Calibri" pitchFamily="34" charset="-120"/>
               </a:rPr>
-              <a:t>Frontend: {{technologies}}</a:t>
-            </a:r>
-            <a:endParaRPr lang="en-US" sz="1600" dirty="0"/>
-          </a:p>
-          <a:p>
-            <a:pPr marL="342900" indent="-342900">
-              <a:buSzPct val="100000"/>
-              <a:buChar char="•"/>
-            </a:pPr>
-            <a:r>
-              <a:rPr lang="en-US" sz="1600" dirty="0">
+              <a:t>Frontend: {{technologies + version}}</a:t>
+            </a:r>
+            <a:endParaRPr lang="en-US" sz="1500" dirty="0"/>
+          </a:p>
+          <a:p>
+            <a:pPr>
+              <a:spcAft>
+                <a:spcPts val="800"/>
+              </a:spcAft>
+            </a:pPr>
+            <a:r>
+              <a:rPr lang="en-US" sz="1500" dirty="0">
                 <a:solidFill>
                   <a:srgbClr val="E8ECF4"/>
                 </a:solidFill>
@@ -3499,17 +4141,18 @@
                 <a:ea typeface="Calibri" pitchFamily="34" charset="-122"/>
                 <a:cs typeface="Calibri" pitchFamily="34" charset="-120"/>
               </a:rPr>
-              <a:t>Backend: {{technologies}}</a:t>
-            </a:r>
-            <a:endParaRPr lang="en-US" sz="1600" dirty="0"/>
-          </a:p>
-          <a:p>
-            <a:pPr marL="342900" indent="-342900">
-              <a:buSzPct val="100000"/>
-              <a:buChar char="•"/>
-            </a:pPr>
-            <a:r>
-              <a:rPr lang="en-US" sz="1600" dirty="0">
+              <a:t>Backend: {{technologies + version}}</a:t>
+            </a:r>
+            <a:endParaRPr lang="en-US" sz="1500" dirty="0"/>
+          </a:p>
+          <a:p>
+            <a:pPr>
+              <a:spcAft>
+                <a:spcPts val="800"/>
+              </a:spcAft>
+            </a:pPr>
+            <a:r>
+              <a:rPr lang="en-US" sz="1500" dirty="0">
                 <a:solidFill>
                   <a:srgbClr val="E8ECF4"/>
                 </a:solidFill>
@@ -3517,9 +4160,9 @@
                 <a:ea typeface="Calibri" pitchFamily="34" charset="-122"/>
                 <a:cs typeface="Calibri" pitchFamily="34" charset="-120"/>
               </a:rPr>
-              <a:t>Infrastructure: {{technologies}}</a:t>
-            </a:r>
-            <a:endParaRPr lang="en-US" sz="1600" dirty="0"/>
+              <a:t>Infrastructure: {{cloud + container + CI/CD}}</a:t>
+            </a:r>
+            <a:endParaRPr lang="en-US" sz="1500" dirty="0"/>
           </a:p>
         </p:txBody>
       </p:sp>
@@ -3557,7 +4200,7 @@
         <p:spPr>
           <a:xfrm>
             <a:off x="0" y="0"/>
-            <a:ext cx="12192000" cy="1005840"/>
+            <a:ext cx="12192000" cy="914400"/>
           </a:xfrm>
           <a:prstGeom prst="rect">
             <a:avLst/>
@@ -3576,8 +4219,8 @@
         </p:nvSpPr>
         <p:spPr>
           <a:xfrm>
-            <a:off x="365760" y="164592"/>
-            <a:ext cx="10607040" cy="685800"/>
+            <a:off x="347472" y="109728"/>
+            <a:ext cx="11612880" cy="694944"/>
           </a:xfrm>
           <a:prstGeom prst="rect">
             <a:avLst/>
@@ -3593,7 +4236,7 @@
               <a:buNone/>
             </a:pPr>
             <a:r>
-              <a:rPr lang="en-US" sz="2400" b="1" dirty="0">
+              <a:rPr lang="en-US" sz="2200" b="1" dirty="0">
                 <a:solidFill>
                   <a:srgbClr val="E8ECF4"/>
                 </a:solidFill>
@@ -3601,22 +4244,42 @@
                 <a:ea typeface="Calibri" pitchFamily="34" charset="-122"/>
                 <a:cs typeface="Calibri" pitchFamily="34" charset="-120"/>
               </a:rPr>
-              <a:t>Security &amp; Compliance</a:t>
-            </a:r>
-            <a:endParaRPr lang="en-US" sz="2400" dirty="0"/>
-          </a:p>
-        </p:txBody>
-      </p:sp>
-      <p:sp>
-        <p:nvSpPr>
-          <p:cNvPr id="4" name="Text 2"/>
-          <p:cNvSpPr/>
-          <p:nvPr/>
-        </p:nvSpPr>
-        <p:spPr>
-          <a:xfrm>
-            <a:off x="457200" y="1188720"/>
-            <a:ext cx="10424160" cy="4754880"/>
+              <a:t>Security &amp; Scalability</a:t>
+            </a:r>
+            <a:endParaRPr lang="en-US" sz="2200" dirty="0"/>
+          </a:p>
+        </p:txBody>
+      </p:sp>
+      <p:sp>
+        <p:nvSpPr>
+          <p:cNvPr id="4" name="Shape 2"/>
+          <p:cNvSpPr/>
+          <p:nvPr/>
+        </p:nvSpPr>
+        <p:spPr>
+          <a:xfrm>
+            <a:off x="5989320" y="1051560"/>
+            <a:ext cx="36576" cy="5303520"/>
+          </a:xfrm>
+          <a:prstGeom prst="rect">
+            <a:avLst/>
+          </a:prstGeom>
+          <a:solidFill>
+            <a:srgbClr val="5A637A"/>
+          </a:solidFill>
+          <a:ln/>
+        </p:spPr>
+      </p:sp>
+      <p:sp>
+        <p:nvSpPr>
+          <p:cNvPr id="5" name="Text 3"/>
+          <p:cNvSpPr/>
+          <p:nvPr/>
+        </p:nvSpPr>
+        <p:spPr>
+          <a:xfrm>
+            <a:off x="347472" y="1051560"/>
+            <a:ext cx="5486400" cy="411480"/>
           </a:xfrm>
           <a:prstGeom prst="rect">
             <a:avLst/>
@@ -3625,15 +4288,57 @@
           <a:ln/>
         </p:spPr>
         <p:txBody>
+          <a:bodyPr wrap="square" rtlCol="0" anchor="ctr"/>
+          <a:lstStyle/>
+          <a:p>
+            <a:pPr indent="0" marL="0">
+              <a:buNone/>
+            </a:pPr>
+            <a:r>
+              <a:rPr lang="en-US" sz="1300" b="1" dirty="0">
+                <a:solidFill>
+                  <a:srgbClr val="4F6EF7"/>
+                </a:solidFill>
+                <a:latin typeface="Calibri" pitchFamily="34" charset="0"/>
+                <a:ea typeface="Calibri" pitchFamily="34" charset="-122"/>
+                <a:cs typeface="Calibri" pitchFamily="34" charset="-120"/>
+              </a:rPr>
+              <a:t>Security</a:t>
+            </a:r>
+            <a:endParaRPr lang="en-US" sz="1300" dirty="0"/>
+          </a:p>
+        </p:txBody>
+      </p:sp>
+      <p:sp>
+        <p:nvSpPr>
+          <p:cNvPr id="6" name="Text 4"/>
+          <p:cNvSpPr/>
+          <p:nvPr/>
+        </p:nvSpPr>
+        <p:spPr>
+          <a:xfrm>
+            <a:off x="347472" y="1554480"/>
+            <a:ext cx="5486400" cy="4572000"/>
+          </a:xfrm>
+          <a:prstGeom prst="rect">
+            <a:avLst/>
+          </a:prstGeom>
+          <a:noFill/>
+          <a:ln/>
+        </p:spPr>
+        <p:txBody>
           <a:bodyPr wrap="square" rtlCol="0" anchor="t"/>
           <a:lstStyle/>
           <a:p>
             <a:pPr marL="342900" indent="-342900">
+              <a:spcAft>
+                <a:spcPts val="700"/>
+              </a:spcAft>
               <a:buSzPct val="100000"/>
               <a:buChar char="•"/>
             </a:pPr>
             <a:r>
-              <a:rPr lang="en-US" sz="1600" dirty="0">
+              <a:rPr lang="en-US" sz="1400" dirty="0">
                 <a:solidFill>
                   <a:srgbClr val="E8ECF4"/>
                 </a:solidFill>
@@ -3641,17 +4346,20 @@
                 <a:ea typeface="Calibri" pitchFamily="34" charset="-122"/>
                 <a:cs typeface="Calibri" pitchFamily="34" charset="-120"/>
               </a:rPr>
-              <a:t>{{Auth strategy}}</a:t>
-            </a:r>
-            <a:endParaRPr lang="en-US" sz="1600" dirty="0"/>
+              <a:t>Auth: {{OAuth2 / JWT / RBAC}}</a:t>
+            </a:r>
+            <a:endParaRPr lang="en-US" sz="1400" dirty="0"/>
           </a:p>
           <a:p>
             <a:pPr marL="342900" indent="-342900">
+              <a:spcAft>
+                <a:spcPts val="700"/>
+              </a:spcAft>
               <a:buSzPct val="100000"/>
               <a:buChar char="•"/>
             </a:pPr>
             <a:r>
-              <a:rPr lang="en-US" sz="1600" dirty="0">
+              <a:rPr lang="en-US" sz="1400" dirty="0">
                 <a:solidFill>
                   <a:srgbClr val="E8ECF4"/>
                 </a:solidFill>
@@ -3659,17 +4367,20 @@
                 <a:ea typeface="Calibri" pitchFamily="34" charset="-122"/>
                 <a:cs typeface="Calibri" pitchFamily="34" charset="-120"/>
               </a:rPr>
-              <a:t>{{Data encryption}}</a:t>
-            </a:r>
-            <a:endParaRPr lang="en-US" sz="1600" dirty="0"/>
+              <a:t>Encryption: {{at rest + in transit}}</a:t>
+            </a:r>
+            <a:endParaRPr lang="en-US" sz="1400" dirty="0"/>
           </a:p>
           <a:p>
             <a:pPr marL="342900" indent="-342900">
+              <a:spcAft>
+                <a:spcPts val="700"/>
+              </a:spcAft>
               <a:buSzPct val="100000"/>
               <a:buChar char="•"/>
             </a:pPr>
             <a:r>
-              <a:rPr lang="en-US" sz="1600" dirty="0">
+              <a:rPr lang="en-US" sz="1400" dirty="0">
                 <a:solidFill>
                   <a:srgbClr val="E8ECF4"/>
                 </a:solidFill>
@@ -3677,9 +4388,133 @@
                 <a:ea typeface="Calibri" pitchFamily="34" charset="-122"/>
                 <a:cs typeface="Calibri" pitchFamily="34" charset="-120"/>
               </a:rPr>
-              <a:t>{{Compliance requirements}}</a:t>
-            </a:r>
-            <a:endParaRPr lang="en-US" sz="1600" dirty="0"/>
+              <a:t>Compliance: {{SOC2 / GDPR / HIPAA}}</a:t>
+            </a:r>
+            <a:endParaRPr lang="en-US" sz="1400" dirty="0"/>
+          </a:p>
+        </p:txBody>
+      </p:sp>
+      <p:sp>
+        <p:nvSpPr>
+          <p:cNvPr id="7" name="Text 5"/>
+          <p:cNvSpPr/>
+          <p:nvPr/>
+        </p:nvSpPr>
+        <p:spPr>
+          <a:xfrm>
+            <a:off x="6309360" y="1051560"/>
+            <a:ext cx="5486400" cy="411480"/>
+          </a:xfrm>
+          <a:prstGeom prst="rect">
+            <a:avLst/>
+          </a:prstGeom>
+          <a:noFill/>
+          <a:ln/>
+        </p:spPr>
+        <p:txBody>
+          <a:bodyPr wrap="square" rtlCol="0" anchor="ctr"/>
+          <a:lstStyle/>
+          <a:p>
+            <a:pPr indent="0" marL="0">
+              <a:buNone/>
+            </a:pPr>
+            <a:r>
+              <a:rPr lang="en-US" sz="1300" b="1" dirty="0">
+                <a:solidFill>
+                  <a:srgbClr val="4F6EF7"/>
+                </a:solidFill>
+                <a:latin typeface="Calibri" pitchFamily="34" charset="0"/>
+                <a:ea typeface="Calibri" pitchFamily="34" charset="-122"/>
+                <a:cs typeface="Calibri" pitchFamily="34" charset="-120"/>
+              </a:rPr>
+              <a:t>Scalability</a:t>
+            </a:r>
+            <a:endParaRPr lang="en-US" sz="1300" dirty="0"/>
+          </a:p>
+        </p:txBody>
+      </p:sp>
+      <p:sp>
+        <p:nvSpPr>
+          <p:cNvPr id="8" name="Text 6"/>
+          <p:cNvSpPr/>
+          <p:nvPr/>
+        </p:nvSpPr>
+        <p:spPr>
+          <a:xfrm>
+            <a:off x="6309360" y="1554480"/>
+            <a:ext cx="5486400" cy="4572000"/>
+          </a:xfrm>
+          <a:prstGeom prst="rect">
+            <a:avLst/>
+          </a:prstGeom>
+          <a:noFill/>
+          <a:ln/>
+        </p:spPr>
+        <p:txBody>
+          <a:bodyPr wrap="square" rtlCol="0" anchor="t"/>
+          <a:lstStyle/>
+          <a:p>
+            <a:pPr marL="342900" indent="-342900">
+              <a:spcAft>
+                <a:spcPts val="700"/>
+              </a:spcAft>
+              <a:buSzPct val="100000"/>
+              <a:buChar char="•"/>
+            </a:pPr>
+            <a:r>
+              <a:rPr lang="en-US" sz="1400" dirty="0">
+                <a:solidFill>
+                  <a:srgbClr val="E8ECF4"/>
+                </a:solidFill>
+                <a:latin typeface="Calibri" pitchFamily="34" charset="0"/>
+                <a:ea typeface="Calibri" pitchFamily="34" charset="-122"/>
+                <a:cs typeface="Calibri" pitchFamily="34" charset="-120"/>
+              </a:rPr>
+              <a:t>Scale-out: {{horizontal strategy}}</a:t>
+            </a:r>
+            <a:endParaRPr lang="en-US" sz="1400" dirty="0"/>
+          </a:p>
+          <a:p>
+            <a:pPr marL="342900" indent="-342900">
+              <a:spcAft>
+                <a:spcPts val="700"/>
+              </a:spcAft>
+              <a:buSzPct val="100000"/>
+              <a:buChar char="•"/>
+            </a:pPr>
+            <a:r>
+              <a:rPr lang="en-US" sz="1400" dirty="0">
+                <a:solidFill>
+                  <a:srgbClr val="E8ECF4"/>
+                </a:solidFill>
+                <a:latin typeface="Calibri" pitchFamily="34" charset="0"/>
+                <a:ea typeface="Calibri" pitchFamily="34" charset="-122"/>
+                <a:cs typeface="Calibri" pitchFamily="34" charset="-120"/>
+              </a:rPr>
+              <a:t>Throughput target: {{X req/sec}}</a:t>
+            </a:r>
+            <a:endParaRPr lang="en-US" sz="1400" dirty="0"/>
+          </a:p>
+          <a:p>
+            <a:pPr marL="342900" indent="-342900">
+              <a:spcAft>
+                <a:spcPts val="700"/>
+              </a:spcAft>
+              <a:buSzPct val="100000"/>
+              <a:buChar char="•"/>
+            </a:pPr>
+            <a:r>
+              <a:rPr lang="en-US" sz="1400" dirty="0">
+                <a:solidFill>
+                  <a:srgbClr val="E8ECF4"/>
+                </a:solidFill>
+                <a:latin typeface="Calibri" pitchFamily="34" charset="0"/>
+                <a:ea typeface="Calibri" pitchFamily="34" charset="-122"/>
+                <a:cs typeface="Calibri" pitchFamily="34" charset="-120"/>
+              </a:rPr>
+              <a:t>Bottleneck mitigation: {{caching / queue}}</a:t>
+            </a:r>
+            <a:endParaRPr lang="en-US" sz="1400" dirty="0"/>
           </a:p>
         </p:txBody>
       </p:sp>
@@ -3717,7 +4552,7 @@
         <p:spPr>
           <a:xfrm>
             <a:off x="0" y="0"/>
-            <a:ext cx="12192000" cy="1005840"/>
+            <a:ext cx="12192000" cy="914400"/>
           </a:xfrm>
           <a:prstGeom prst="rect">
             <a:avLst/>
@@ -3736,8 +4571,8 @@
         </p:nvSpPr>
         <p:spPr>
           <a:xfrm>
-            <a:off x="365760" y="164592"/>
-            <a:ext cx="10607040" cy="685800"/>
+            <a:off x="347472" y="109728"/>
+            <a:ext cx="11612880" cy="694944"/>
           </a:xfrm>
           <a:prstGeom prst="rect">
             <a:avLst/>
@@ -3753,7 +4588,7 @@
               <a:buNone/>
             </a:pPr>
             <a:r>
-              <a:rPr lang="en-US" sz="2400" b="1" dirty="0">
+              <a:rPr lang="en-US" sz="2200" b="1" dirty="0">
                 <a:solidFill>
                   <a:srgbClr val="E8ECF4"/>
                 </a:solidFill>
@@ -3761,22 +4596,47 @@
                 <a:ea typeface="Calibri" pitchFamily="34" charset="-122"/>
                 <a:cs typeface="Calibri" pitchFamily="34" charset="-120"/>
               </a:rPr>
-              <a:t>Scalability &amp; Performance</a:t>
-            </a:r>
-            <a:endParaRPr lang="en-US" sz="2400" dirty="0"/>
-          </a:p>
-        </p:txBody>
-      </p:sp>
-      <p:sp>
-        <p:nvSpPr>
-          <p:cNvPr id="4" name="Text 2"/>
-          <p:cNvSpPr/>
-          <p:nvPr/>
-        </p:nvSpPr>
-        <p:spPr>
-          <a:xfrm>
-            <a:off x="457200" y="1188720"/>
-            <a:ext cx="10424160" cy="4754880"/>
+              <a:t>Performance Targets</a:t>
+            </a:r>
+            <a:endParaRPr lang="en-US" sz="2200" dirty="0"/>
+          </a:p>
+        </p:txBody>
+      </p:sp>
+      <p:sp>
+        <p:nvSpPr>
+          <p:cNvPr id="4" name="Shape 2"/>
+          <p:cNvSpPr/>
+          <p:nvPr/>
+        </p:nvSpPr>
+        <p:spPr>
+          <a:xfrm>
+            <a:off x="441198" y="1463040"/>
+            <a:ext cx="3474720" cy="2926080"/>
+          </a:xfrm>
+          <a:prstGeom prst="rect">
+            <a:avLst/>
+          </a:prstGeom>
+          <a:solidFill>
+            <a:srgbClr val="2D3142"/>
+          </a:solidFill>
+          <a:ln w="19050">
+            <a:solidFill>
+              <a:srgbClr val="4F6EF7"/>
+            </a:solidFill>
+            <a:prstDash val="solid"/>
+          </a:ln>
+        </p:spPr>
+      </p:sp>
+      <p:sp>
+        <p:nvSpPr>
+          <p:cNvPr id="5" name="Text 3"/>
+          <p:cNvSpPr/>
+          <p:nvPr/>
+        </p:nvSpPr>
+        <p:spPr>
+          <a:xfrm>
+            <a:off x="441198" y="1645920"/>
+            <a:ext cx="3474720" cy="1280160"/>
           </a:xfrm>
           <a:prstGeom prst="rect">
             <a:avLst/>
@@ -3785,15 +4645,53 @@
           <a:ln/>
         </p:spPr>
         <p:txBody>
-          <a:bodyPr wrap="square" rtlCol="0" anchor="t"/>
-          <a:lstStyle/>
-          <a:p>
-            <a:pPr marL="342900" indent="-342900">
-              <a:buSzPct val="100000"/>
-              <a:buChar char="•"/>
-            </a:pPr>
-            <a:r>
-              <a:rPr lang="en-US" sz="1600" dirty="0">
+          <a:bodyPr wrap="square" rtlCol="0" anchor="ctr"/>
+          <a:lstStyle/>
+          <a:p>
+            <a:pPr algn="ctr" indent="0" marL="0">
+              <a:buNone/>
+            </a:pPr>
+            <a:r>
+              <a:rPr lang="en-US" sz="4000" b="1" dirty="0">
+                <a:solidFill>
+                  <a:srgbClr val="4F6EF7"/>
+                </a:solidFill>
+                <a:latin typeface="Calibri" pitchFamily="34" charset="0"/>
+                <a:ea typeface="Calibri" pitchFamily="34" charset="-122"/>
+                <a:cs typeface="Calibri" pitchFamily="34" charset="-120"/>
+              </a:rPr>
+              <a:t>&lt;{{N}}ms</a:t>
+            </a:r>
+            <a:endParaRPr lang="en-US" sz="4000" dirty="0"/>
+          </a:p>
+        </p:txBody>
+      </p:sp>
+      <p:sp>
+        <p:nvSpPr>
+          <p:cNvPr id="6" name="Text 4"/>
+          <p:cNvSpPr/>
+          <p:nvPr/>
+        </p:nvSpPr>
+        <p:spPr>
+          <a:xfrm>
+            <a:off x="441198" y="2926080"/>
+            <a:ext cx="3474720" cy="502920"/>
+          </a:xfrm>
+          <a:prstGeom prst="rect">
+            <a:avLst/>
+          </a:prstGeom>
+          <a:noFill/>
+          <a:ln/>
+        </p:spPr>
+        <p:txBody>
+          <a:bodyPr wrap="square" rtlCol="0" anchor="ctr"/>
+          <a:lstStyle/>
+          <a:p>
+            <a:pPr algn="ctr" indent="0" marL="0">
+              <a:buNone/>
+            </a:pPr>
+            <a:r>
+              <a:rPr lang="en-US" sz="1500" dirty="0">
                 <a:solidFill>
                   <a:srgbClr val="E8ECF4"/>
                 </a:solidFill>
@@ -3801,17 +4699,141 @@
                 <a:ea typeface="Calibri" pitchFamily="34" charset="-122"/>
                 <a:cs typeface="Calibri" pitchFamily="34" charset="-120"/>
               </a:rPr>
-              <a:t>{{Scaling approach}}</a:t>
-            </a:r>
-            <a:endParaRPr lang="en-US" sz="1600" dirty="0"/>
-          </a:p>
-          <a:p>
-            <a:pPr marL="342900" indent="-342900">
-              <a:buSzPct val="100000"/>
-              <a:buChar char="•"/>
-            </a:pPr>
-            <a:r>
-              <a:rPr lang="en-US" sz="1600" dirty="0">
+              <a:t>p95 Latency</a:t>
+            </a:r>
+            <a:endParaRPr lang="en-US" sz="1500" dirty="0"/>
+          </a:p>
+        </p:txBody>
+      </p:sp>
+      <p:sp>
+        <p:nvSpPr>
+          <p:cNvPr id="7" name="Text 5"/>
+          <p:cNvSpPr/>
+          <p:nvPr/>
+        </p:nvSpPr>
+        <p:spPr>
+          <a:xfrm>
+            <a:off x="441198" y="3429000"/>
+            <a:ext cx="3474720" cy="365760"/>
+          </a:xfrm>
+          <a:prstGeom prst="rect">
+            <a:avLst/>
+          </a:prstGeom>
+          <a:noFill/>
+          <a:ln/>
+        </p:spPr>
+        <p:txBody>
+          <a:bodyPr wrap="square" rtlCol="0" anchor="ctr"/>
+          <a:lstStyle/>
+          <a:p>
+            <a:pPr algn="ctr" indent="0" marL="0">
+              <a:buNone/>
+            </a:pPr>
+            <a:r>
+              <a:rPr lang="en-US" sz="1100" dirty="0">
+                <a:solidFill>
+                  <a:srgbClr val="8892B0"/>
+                </a:solidFill>
+                <a:latin typeface="Calibri" pitchFamily="34" charset="0"/>
+                <a:ea typeface="Calibri" pitchFamily="34" charset="-122"/>
+                <a:cs typeface="Calibri" pitchFamily="34" charset="-120"/>
+              </a:rPr>
+              <a:t>API response time</a:t>
+            </a:r>
+            <a:endParaRPr lang="en-US" sz="1100" dirty="0"/>
+          </a:p>
+        </p:txBody>
+      </p:sp>
+      <p:sp>
+        <p:nvSpPr>
+          <p:cNvPr id="8" name="Shape 6"/>
+          <p:cNvSpPr/>
+          <p:nvPr/>
+        </p:nvSpPr>
+        <p:spPr>
+          <a:xfrm>
+            <a:off x="4357116" y="1463040"/>
+            <a:ext cx="3474720" cy="2926080"/>
+          </a:xfrm>
+          <a:prstGeom prst="rect">
+            <a:avLst/>
+          </a:prstGeom>
+          <a:solidFill>
+            <a:srgbClr val="2D3142"/>
+          </a:solidFill>
+          <a:ln w="19050">
+            <a:solidFill>
+              <a:srgbClr val="4F6EF7"/>
+            </a:solidFill>
+            <a:prstDash val="solid"/>
+          </a:ln>
+        </p:spPr>
+      </p:sp>
+      <p:sp>
+        <p:nvSpPr>
+          <p:cNvPr id="9" name="Text 7"/>
+          <p:cNvSpPr/>
+          <p:nvPr/>
+        </p:nvSpPr>
+        <p:spPr>
+          <a:xfrm>
+            <a:off x="4357116" y="1645920"/>
+            <a:ext cx="3474720" cy="1280160"/>
+          </a:xfrm>
+          <a:prstGeom prst="rect">
+            <a:avLst/>
+          </a:prstGeom>
+          <a:noFill/>
+          <a:ln/>
+        </p:spPr>
+        <p:txBody>
+          <a:bodyPr wrap="square" rtlCol="0" anchor="ctr"/>
+          <a:lstStyle/>
+          <a:p>
+            <a:pPr algn="ctr" indent="0" marL="0">
+              <a:buNone/>
+            </a:pPr>
+            <a:r>
+              <a:rPr lang="en-US" sz="4000" b="1" dirty="0">
+                <a:solidFill>
+                  <a:srgbClr val="4F6EF7"/>
+                </a:solidFill>
+                <a:latin typeface="Calibri" pitchFamily="34" charset="0"/>
+                <a:ea typeface="Calibri" pitchFamily="34" charset="-122"/>
+                <a:cs typeface="Calibri" pitchFamily="34" charset="-120"/>
+              </a:rPr>
+              <a:t>{{X}}K/s</a:t>
+            </a:r>
+            <a:endParaRPr lang="en-US" sz="4000" dirty="0"/>
+          </a:p>
+        </p:txBody>
+      </p:sp>
+      <p:sp>
+        <p:nvSpPr>
+          <p:cNvPr id="10" name="Text 8"/>
+          <p:cNvSpPr/>
+          <p:nvPr/>
+        </p:nvSpPr>
+        <p:spPr>
+          <a:xfrm>
+            <a:off x="4357116" y="2926080"/>
+            <a:ext cx="3474720" cy="502920"/>
+          </a:xfrm>
+          <a:prstGeom prst="rect">
+            <a:avLst/>
+          </a:prstGeom>
+          <a:noFill/>
+          <a:ln/>
+        </p:spPr>
+        <p:txBody>
+          <a:bodyPr wrap="square" rtlCol="0" anchor="ctr"/>
+          <a:lstStyle/>
+          <a:p>
+            <a:pPr algn="ctr" indent="0" marL="0">
+              <a:buNone/>
+            </a:pPr>
+            <a:r>
+              <a:rPr lang="en-US" sz="1500" dirty="0">
                 <a:solidFill>
                   <a:srgbClr val="E8ECF4"/>
                 </a:solidFill>
@@ -3819,17 +4841,141 @@
                 <a:ea typeface="Calibri" pitchFamily="34" charset="-122"/>
                 <a:cs typeface="Calibri" pitchFamily="34" charset="-120"/>
               </a:rPr>
-              <a:t>{{Performance targets}}</a:t>
-            </a:r>
-            <a:endParaRPr lang="en-US" sz="1600" dirty="0"/>
-          </a:p>
-          <a:p>
-            <a:pPr marL="342900" indent="-342900">
-              <a:buSzPct val="100000"/>
-              <a:buChar char="•"/>
-            </a:pPr>
-            <a:r>
-              <a:rPr lang="en-US" sz="1600" dirty="0">
+              <a:t>Throughput</a:t>
+            </a:r>
+            <a:endParaRPr lang="en-US" sz="1500" dirty="0"/>
+          </a:p>
+        </p:txBody>
+      </p:sp>
+      <p:sp>
+        <p:nvSpPr>
+          <p:cNvPr id="11" name="Text 9"/>
+          <p:cNvSpPr/>
+          <p:nvPr/>
+        </p:nvSpPr>
+        <p:spPr>
+          <a:xfrm>
+            <a:off x="4357116" y="3429000"/>
+            <a:ext cx="3474720" cy="365760"/>
+          </a:xfrm>
+          <a:prstGeom prst="rect">
+            <a:avLst/>
+          </a:prstGeom>
+          <a:noFill/>
+          <a:ln/>
+        </p:spPr>
+        <p:txBody>
+          <a:bodyPr wrap="square" rtlCol="0" anchor="ctr"/>
+          <a:lstStyle/>
+          <a:p>
+            <a:pPr algn="ctr" indent="0" marL="0">
+              <a:buNone/>
+            </a:pPr>
+            <a:r>
+              <a:rPr lang="en-US" sz="1100" dirty="0">
+                <a:solidFill>
+                  <a:srgbClr val="8892B0"/>
+                </a:solidFill>
+                <a:latin typeface="Calibri" pitchFamily="34" charset="0"/>
+                <a:ea typeface="Calibri" pitchFamily="34" charset="-122"/>
+                <a:cs typeface="Calibri" pitchFamily="34" charset="-120"/>
+              </a:rPr>
+              <a:t>Requests per second</a:t>
+            </a:r>
+            <a:endParaRPr lang="en-US" sz="1100" dirty="0"/>
+          </a:p>
+        </p:txBody>
+      </p:sp>
+      <p:sp>
+        <p:nvSpPr>
+          <p:cNvPr id="12" name="Shape 10"/>
+          <p:cNvSpPr/>
+          <p:nvPr/>
+        </p:nvSpPr>
+        <p:spPr>
+          <a:xfrm>
+            <a:off x="8273034" y="1463040"/>
+            <a:ext cx="3474720" cy="2926080"/>
+          </a:xfrm>
+          <a:prstGeom prst="rect">
+            <a:avLst/>
+          </a:prstGeom>
+          <a:solidFill>
+            <a:srgbClr val="2D3142"/>
+          </a:solidFill>
+          <a:ln w="19050">
+            <a:solidFill>
+              <a:srgbClr val="4F6EF7"/>
+            </a:solidFill>
+            <a:prstDash val="solid"/>
+          </a:ln>
+        </p:spPr>
+      </p:sp>
+      <p:sp>
+        <p:nvSpPr>
+          <p:cNvPr id="13" name="Text 11"/>
+          <p:cNvSpPr/>
+          <p:nvPr/>
+        </p:nvSpPr>
+        <p:spPr>
+          <a:xfrm>
+            <a:off x="8273034" y="1645920"/>
+            <a:ext cx="3474720" cy="1280160"/>
+          </a:xfrm>
+          <a:prstGeom prst="rect">
+            <a:avLst/>
+          </a:prstGeom>
+          <a:noFill/>
+          <a:ln/>
+        </p:spPr>
+        <p:txBody>
+          <a:bodyPr wrap="square" rtlCol="0" anchor="ctr"/>
+          <a:lstStyle/>
+          <a:p>
+            <a:pPr algn="ctr" indent="0" marL="0">
+              <a:buNone/>
+            </a:pPr>
+            <a:r>
+              <a:rPr lang="en-US" sz="4000" b="1" dirty="0">
+                <a:solidFill>
+                  <a:srgbClr val="4F6EF7"/>
+                </a:solidFill>
+                <a:latin typeface="Calibri" pitchFamily="34" charset="0"/>
+                <a:ea typeface="Calibri" pitchFamily="34" charset="-122"/>
+                <a:cs typeface="Calibri" pitchFamily="34" charset="-120"/>
+              </a:rPr>
+              <a:t>99.{{N}}%</a:t>
+            </a:r>
+            <a:endParaRPr lang="en-US" sz="4000" dirty="0"/>
+          </a:p>
+        </p:txBody>
+      </p:sp>
+      <p:sp>
+        <p:nvSpPr>
+          <p:cNvPr id="14" name="Text 12"/>
+          <p:cNvSpPr/>
+          <p:nvPr/>
+        </p:nvSpPr>
+        <p:spPr>
+          <a:xfrm>
+            <a:off x="8273034" y="2926080"/>
+            <a:ext cx="3474720" cy="502920"/>
+          </a:xfrm>
+          <a:prstGeom prst="rect">
+            <a:avLst/>
+          </a:prstGeom>
+          <a:noFill/>
+          <a:ln/>
+        </p:spPr>
+        <p:txBody>
+          <a:bodyPr wrap="square" rtlCol="0" anchor="ctr"/>
+          <a:lstStyle/>
+          <a:p>
+            <a:pPr algn="ctr" indent="0" marL="0">
+              <a:buNone/>
+            </a:pPr>
+            <a:r>
+              <a:rPr lang="en-US" sz="1500" dirty="0">
                 <a:solidFill>
                   <a:srgbClr val="E8ECF4"/>
                 </a:solidFill>
@@ -3837,9 +4983,48 @@
                 <a:ea typeface="Calibri" pitchFamily="34" charset="-122"/>
                 <a:cs typeface="Calibri" pitchFamily="34" charset="-120"/>
               </a:rPr>
-              <a:t>{{Bottleneck mitigations}}</a:t>
-            </a:r>
-            <a:endParaRPr lang="en-US" sz="1600" dirty="0"/>
+              <a:t>Availability</a:t>
+            </a:r>
+            <a:endParaRPr lang="en-US" sz="1500" dirty="0"/>
+          </a:p>
+        </p:txBody>
+      </p:sp>
+      <p:sp>
+        <p:nvSpPr>
+          <p:cNvPr id="15" name="Text 13"/>
+          <p:cNvSpPr/>
+          <p:nvPr/>
+        </p:nvSpPr>
+        <p:spPr>
+          <a:xfrm>
+            <a:off x="8273034" y="3429000"/>
+            <a:ext cx="3474720" cy="365760"/>
+          </a:xfrm>
+          <a:prstGeom prst="rect">
+            <a:avLst/>
+          </a:prstGeom>
+          <a:noFill/>
+          <a:ln/>
+        </p:spPr>
+        <p:txBody>
+          <a:bodyPr wrap="square" rtlCol="0" anchor="ctr"/>
+          <a:lstStyle/>
+          <a:p>
+            <a:pPr algn="ctr" indent="0" marL="0">
+              <a:buNone/>
+            </a:pPr>
+            <a:r>
+              <a:rPr lang="en-US" sz="1100" dirty="0">
+                <a:solidFill>
+                  <a:srgbClr val="8892B0"/>
+                </a:solidFill>
+                <a:latin typeface="Calibri" pitchFamily="34" charset="0"/>
+                <a:ea typeface="Calibri" pitchFamily="34" charset="-122"/>
+                <a:cs typeface="Calibri" pitchFamily="34" charset="-120"/>
+              </a:rPr>
+              <a:t>Monthly uptime SLA</a:t>
+            </a:r>
+            <a:endParaRPr lang="en-US" sz="1100" dirty="0"/>
           </a:p>
         </p:txBody>
       </p:sp>
